--- a/docs/Tether-Review3-Presentation.pptx
+++ b/docs/Tether-Review3-Presentation.pptx
@@ -189,7 +189,7 @@
             <a:pPr>
               <a:defRPr sz="1200" b="0" i="0" u="none" strike="noStrike">
                 <a:solidFill>
-                  <a:srgbClr val="4A5260"/>
+                  <a:srgbClr val="A9ACB2"/>
                 </a:solidFill>
                 <a:latin typeface="+mn-lt"/>
               </a:defRPr>
@@ -197,7 +197,7 @@
             <a:r>
               <a:rPr sz="1200" b="0" i="0" u="none" strike="noStrike">
                 <a:solidFill>
-                  <a:srgbClr val="4A5260"/>
+                  <a:srgbClr val="A9ACB2"/>
                 </a:solidFill>
                 <a:latin typeface="+mn-lt"/>
               </a:rPr>
@@ -232,7 +232,7 @@
           </c:tx>
           <c:spPr>
             <a:solidFill>
-              <a:srgbClr val="15181D"/>
+              <a:srgbClr val="B6B8BC"/>
             </a:solidFill>
             <a:effectLst/>
           </c:spPr>
@@ -246,7 +246,7 @@
                 <a:pPr>
                   <a:defRPr b="0" i="0" strike="noStrike" sz="1000" u="none">
                     <a:solidFill>
-                      <a:srgbClr val="15181D"/>
+                      <a:srgbClr val="E4E4E2"/>
                     </a:solidFill>
                     <a:latin typeface="+mn-lt"/>
                   </a:defRPr>
@@ -327,7 +327,7 @@
           </c:tx>
           <c:spPr>
             <a:solidFill>
-              <a:srgbClr val="F5B82E"/>
+              <a:srgbClr val="F0B54A"/>
             </a:solidFill>
             <a:effectLst/>
           </c:spPr>
@@ -341,7 +341,7 @@
                 <a:pPr>
                   <a:defRPr b="0" i="0" strike="noStrike" sz="1000" u="none">
                     <a:solidFill>
-                      <a:srgbClr val="15181D"/>
+                      <a:srgbClr val="E4E4E2"/>
                     </a:solidFill>
                     <a:latin typeface="+mn-lt"/>
                   </a:defRPr>
@@ -415,7 +415,7 @@
               <a:pPr>
                 <a:defRPr b="0" i="0" strike="noStrike" sz="1000" u="none">
                   <a:solidFill>
-                    <a:srgbClr val="15181D"/>
+                    <a:srgbClr val="E4E4E2"/>
                   </a:solidFill>
                   <a:latin typeface="+mn-lt"/>
                 </a:defRPr>
@@ -450,7 +450,7 @@
         <c:spPr>
           <a:ln w="12700" cap="flat">
             <a:solidFill>
-              <a:srgbClr val="888888"/>
+              <a:srgbClr val="3A3D44"/>
             </a:solidFill>
             <a:prstDash val="solid"/>
             <a:round/>
@@ -463,7 +463,7 @@
             <a:pPr>
               <a:defRPr sz="1100" b="0" i="0" u="none" strike="noStrike">
                 <a:solidFill>
-                  <a:srgbClr val="4A5260"/>
+                  <a:srgbClr val="A9ACB2"/>
                 </a:solidFill>
                 <a:latin typeface="+mn-lt"/>
               </a:defRPr>
@@ -493,7 +493,7 @@
         <c:spPr>
           <a:ln w="12700" cap="flat">
             <a:solidFill>
-              <a:srgbClr val="888888"/>
+              <a:srgbClr val="3A3D44"/>
             </a:solidFill>
             <a:prstDash val="solid"/>
             <a:round/>
@@ -506,7 +506,7 @@
             <a:pPr>
               <a:defRPr sz="1200" b="0" i="0" u="none" strike="noStrike">
                 <a:solidFill>
-                  <a:srgbClr val="000000"/>
+                  <a:srgbClr val="A9ACB2"/>
                 </a:solidFill>
                 <a:latin typeface="Arial"/>
               </a:defRPr>
@@ -536,7 +536,7 @@
           <a:pPr>
             <a:defRPr sz="1100">
               <a:solidFill>
-                <a:srgbClr val="4A5260"/>
+                <a:srgbClr val="A9ACB2"/>
               </a:solidFill>
               <a:latin typeface="+mn-lt"/>
               <a:cs typeface="+mn-lt"/>
@@ -576,7 +576,7 @@
             <a:pPr>
               <a:defRPr sz="1200" b="0" i="0" u="none" strike="noStrike">
                 <a:solidFill>
-                  <a:srgbClr val="4A5260"/>
+                  <a:srgbClr val="A9ACB2"/>
                 </a:solidFill>
                 <a:latin typeface="+mn-lt"/>
               </a:defRPr>
@@ -584,7 +584,7 @@
             <a:r>
               <a:rPr sz="1200" b="0" i="0" u="none" strike="noStrike">
                 <a:solidFill>
-                  <a:srgbClr val="4A5260"/>
+                  <a:srgbClr val="A9ACB2"/>
                 </a:solidFill>
                 <a:latin typeface="+mn-lt"/>
               </a:rPr>
@@ -619,7 +619,7 @@
           </c:tx>
           <c:spPr>
             <a:solidFill>
-              <a:srgbClr val="15181D"/>
+              <a:srgbClr val="B6B8BC"/>
             </a:solidFill>
             <a:effectLst/>
           </c:spPr>
@@ -633,7 +633,7 @@
                 <a:pPr>
                   <a:defRPr b="0" i="0" strike="noStrike" sz="1000" u="none">
                     <a:solidFill>
-                      <a:srgbClr val="15181D"/>
+                      <a:srgbClr val="E4E4E2"/>
                     </a:solidFill>
                     <a:latin typeface="+mn-lt"/>
                   </a:defRPr>
@@ -749,7 +749,7 @@
               <a:pPr>
                 <a:defRPr b="0" i="0" strike="noStrike" sz="1000" u="none">
                   <a:solidFill>
-                    <a:srgbClr val="15181D"/>
+                    <a:srgbClr val="E4E4E2"/>
                   </a:solidFill>
                   <a:latin typeface="+mn-lt"/>
                 </a:defRPr>
@@ -795,7 +795,7 @@
             <a:pPr>
               <a:defRPr sz="1050" b="0" i="0" u="none" strike="noStrike">
                 <a:solidFill>
-                  <a:srgbClr val="4A5260"/>
+                  <a:srgbClr val="A9ACB2"/>
                 </a:solidFill>
                 <a:latin typeface="+mn-lt"/>
               </a:defRPr>
@@ -823,7 +823,7 @@
         <c:spPr>
           <a:ln w="12700" cap="flat">
             <a:solidFill>
-              <a:srgbClr val="888888"/>
+              <a:srgbClr val="3A3D44"/>
             </a:solidFill>
             <a:prstDash val="solid"/>
             <a:round/>
@@ -836,7 +836,7 @@
             <a:pPr>
               <a:defRPr sz="1200" b="0" i="0" u="none" strike="noStrike">
                 <a:solidFill>
-                  <a:srgbClr val="000000"/>
+                  <a:srgbClr val="A9ACB2"/>
                 </a:solidFill>
                 <a:latin typeface="Arial"/>
               </a:defRPr>
@@ -1619,7 +1619,7 @@
           <a:p>
             <a:r>
               <a:rPr lang="en-US" dirty="0"/>
-              <a:t>The playground runs the real compiler in the browser. With the -O1 box ticked, the phase strip shows 8 expressions folded and 7 statements removed for the optimisation test program, and the JavaScript shrinks from 21 lines to 12.</a:t>
+              <a:t>The playground runs the real compiler in the browser. With the -O1 switch on, the phase strip shows 8 expressions folded and 7 statements removed for the optimisation test program, and the JavaScript shrinks from 21 lines to 12.</a:t>
             </a:r>
             <a:endParaRPr lang="en-US" dirty="0"/>
           </a:p>
@@ -2841,7 +2841,7 @@
     <p:bg>
       <p:bgPr>
         <a:solidFill>
-          <a:schemeClr val="tx1"/>
+          <a:srgbClr val="0B0C0E"/>
         </a:solidFill>
       </p:bgPr>
     </p:bg>
@@ -2927,7 +2927,7 @@
               <a:buNone/>
               <a:defRPr lang="en-US" sz="6000" b="1" dirty="0">
                 <a:solidFill>
-                  <a:schemeClr val="bg1"/>
+                  <a:schemeClr val="tx1"/>
                 </a:solidFill>
               </a:defRPr>
             </a:lvl1pPr>
@@ -2966,7 +2966,7 @@
               <a:buNone/>
               <a:defRPr lang="en-US" sz="2000" dirty="0">
                 <a:solidFill>
-                  <a:srgbClr val="C9CED6"/>
+                  <a:srgbClr val="B6B8BC"/>
                 </a:solidFill>
               </a:defRPr>
             </a:lvl1pPr>
@@ -3122,7 +3122,7 @@
             <a:lvl1pPr>
               <a:defRPr sz="1000">
                 <a:solidFill>
-                  <a:srgbClr val="9AA1AC"/>
+                  <a:srgbClr val="868A91"/>
                 </a:solidFill>
                 <a:latin typeface="Consolas"/>
                 <a:ea typeface="Consolas"/>
@@ -3195,7 +3195,7 @@
             <a:lvl1pPr>
               <a:defRPr sz="1000">
                 <a:solidFill>
-                  <a:srgbClr val="9AA1AC"/>
+                  <a:srgbClr val="868A91"/>
                 </a:solidFill>
                 <a:latin typeface="Consolas"/>
                 <a:ea typeface="Consolas"/>
@@ -3562,7 +3562,7 @@
             <a:r>
               <a:rPr lang="en-US" sz="6000" b="1" dirty="0">
                 <a:solidFill>
-                  <a:schemeClr val="bg1"/>
+                  <a:schemeClr val="tx1"/>
                 </a:solidFill>
               </a:rPr>
               <a:t>Tether</a:t>
@@ -3600,7 +3600,7 @@
             <a:r>
               <a:rPr lang="en-US" sz="2000" dirty="0">
                 <a:solidFill>
-                  <a:srgbClr val="C9CED6"/>
+                  <a:srgbClr val="B6B8BC"/>
                 </a:solidFill>
               </a:rPr>
               <a:t>Review 3: final implementation (100%)</a:t>
@@ -3656,7 +3656,7 @@
             <a:r>
               <a:rPr lang="en-US" sz="2200" dirty="0">
                 <a:solidFill>
-                  <a:srgbClr val="15181D"/>
+                  <a:srgbClr val="1A1305"/>
                 </a:solidFill>
                 <a:latin typeface="Consolas" pitchFamily="34" charset="0"/>
                 <a:ea typeface="Consolas" pitchFamily="34" charset="-122"/>
@@ -3685,7 +3685,7 @@
           <a:noFill/>
           <a:ln w="12700">
             <a:solidFill>
-              <a:srgbClr val="F5B82E"/>
+              <a:srgbClr val="F0B54A"/>
             </a:solidFill>
             <a:prstDash val="solid"/>
           </a:ln>
@@ -3757,7 +3757,7 @@
             <a:r>
               <a:rPr lang="en-US" sz="1300" i="1" dirty="0">
                 <a:solidFill>
-                  <a:srgbClr val="8B93A1"/>
+                  <a:srgbClr val="8A8E96"/>
                 </a:solidFill>
               </a:rPr>
               <a:t>a breakpoint on the original source, in a debugger that knows nothing about Tether</a:t>
@@ -3793,7 +3793,7 @@
             <a:r>
               <a:rPr lang="en-US" sz="1300" b="1" dirty="0">
                 <a:solidFill>
-                  <a:srgbClr val="FFFFFF"/>
+                  <a:srgbClr val="E4E4E2"/>
                 </a:solidFill>
               </a:rPr>
               <a:t>Antra</a:t>
@@ -3807,7 +3807,7 @@
             <a:r>
               <a:rPr lang="en-US" sz="1300" dirty="0">
                 <a:solidFill>
-                  <a:srgbClr val="B4BAC4"/>
+                  <a:srgbClr val="9A9EA6"/>
                 </a:solidFill>
               </a:rPr>
               <a:t>24BDS0066  ·  Compiler Design</a:t>
@@ -3974,9 +3974,13 @@
             <a:avLst/>
           </a:prstGeom>
           <a:solidFill>
-            <a:schemeClr val="tx1"/>
+            <a:srgbClr val="1E2025"/>
           </a:solidFill>
-          <a:ln/>
+          <a:ln w="9525">
+            <a:solidFill>
+              <a:srgbClr val="2E3138"/>
+            </a:solidFill>
+          </a:ln>
         </p:spPr>
       </p:sp>
       <p:sp>
@@ -4009,7 +4013,7 @@
             <a:r>
               <a:rPr lang="en-US" sz="1000" dirty="0">
                 <a:solidFill>
-                  <a:srgbClr val="E4E7EC"/>
+                  <a:srgbClr val="E4E4E2"/>
                 </a:solidFill>
                 <a:latin typeface="Consolas" pitchFamily="34" charset="0"/>
                 <a:ea typeface="Consolas" pitchFamily="34" charset="-122"/>
@@ -4026,7 +4030,7 @@
             <a:r>
               <a:rPr lang="en-US" sz="1000" dirty="0">
                 <a:solidFill>
-                  <a:srgbClr val="F5B82E"/>
+                  <a:srgbClr val="F0B54A"/>
                 </a:solidFill>
                 <a:latin typeface="Consolas" pitchFamily="34" charset="0"/>
                 <a:ea typeface="Consolas" pitchFamily="34" charset="-122"/>
@@ -4043,7 +4047,7 @@
             <a:r>
               <a:rPr lang="en-US" sz="1000" dirty="0">
                 <a:solidFill>
-                  <a:srgbClr val="E4E7EC"/>
+                  <a:srgbClr val="E4E4E2"/>
                 </a:solidFill>
                 <a:latin typeface="Consolas" pitchFamily="34" charset="0"/>
                 <a:ea typeface="Consolas" pitchFamily="34" charset="-122"/>
@@ -4063,7 +4067,7 @@
             <a:r>
               <a:rPr lang="en-US" sz="1000" dirty="0">
                 <a:solidFill>
-                  <a:srgbClr val="FF8A80"/>
+                  <a:srgbClr val="FF6F6B"/>
                 </a:solidFill>
                 <a:latin typeface="Consolas" pitchFamily="34" charset="0"/>
                 <a:ea typeface="Consolas" pitchFamily="34" charset="-122"/>
@@ -4083,7 +4087,7 @@
             <a:r>
               <a:rPr lang="en-US" sz="1000" dirty="0">
                 <a:solidFill>
-                  <a:srgbClr val="FF8A80"/>
+                  <a:srgbClr val="FF6F6B"/>
                 </a:solidFill>
                 <a:latin typeface="Consolas" pitchFamily="34" charset="0"/>
                 <a:ea typeface="Consolas" pitchFamily="34" charset="-122"/>
@@ -4103,7 +4107,7 @@
             <a:r>
               <a:rPr lang="en-US" sz="1000" dirty="0">
                 <a:solidFill>
-                  <a:srgbClr val="FF8A80"/>
+                  <a:srgbClr val="FF6F6B"/>
                 </a:solidFill>
                 <a:latin typeface="Consolas" pitchFamily="34" charset="0"/>
                 <a:ea typeface="Consolas" pitchFamily="34" charset="-122"/>
@@ -4123,7 +4127,7 @@
             <a:r>
               <a:rPr lang="en-US" sz="1000" dirty="0">
                 <a:solidFill>
-                  <a:srgbClr val="FF8A80"/>
+                  <a:srgbClr val="FF6F6B"/>
                 </a:solidFill>
                 <a:latin typeface="Consolas" pitchFamily="34" charset="0"/>
                 <a:ea typeface="Consolas" pitchFamily="34" charset="-122"/>
@@ -4143,7 +4147,7 @@
             <a:r>
               <a:rPr lang="en-US" sz="1000" dirty="0">
                 <a:solidFill>
-                  <a:srgbClr val="FF8A80"/>
+                  <a:srgbClr val="FF6F6B"/>
                 </a:solidFill>
                 <a:latin typeface="Consolas" pitchFamily="34" charset="0"/>
                 <a:ea typeface="Consolas" pitchFamily="34" charset="-122"/>
@@ -4163,7 +4167,7 @@
             <a:r>
               <a:rPr lang="en-US" sz="1000" dirty="0">
                 <a:solidFill>
-                  <a:srgbClr val="FF8A80"/>
+                  <a:srgbClr val="FF6F6B"/>
                 </a:solidFill>
                 <a:latin typeface="Consolas" pitchFamily="34" charset="0"/>
                 <a:ea typeface="Consolas" pitchFamily="34" charset="-122"/>
@@ -4183,7 +4187,7 @@
             <a:r>
               <a:rPr lang="en-US" sz="1000" dirty="0">
                 <a:solidFill>
-                  <a:srgbClr val="E4E7EC"/>
+                  <a:srgbClr val="E4E4E2"/>
                 </a:solidFill>
                 <a:latin typeface="Consolas" pitchFamily="34" charset="0"/>
                 <a:ea typeface="Consolas" pitchFamily="34" charset="-122"/>
@@ -4203,7 +4207,7 @@
             <a:r>
               <a:rPr lang="en-US" sz="1000" dirty="0">
                 <a:solidFill>
-                  <a:srgbClr val="E4E7EC"/>
+                  <a:srgbClr val="E4E4E2"/>
                 </a:solidFill>
                 <a:latin typeface="Consolas" pitchFamily="34" charset="0"/>
                 <a:ea typeface="Consolas" pitchFamily="34" charset="-122"/>
@@ -4223,7 +4227,7 @@
             <a:r>
               <a:rPr lang="en-US" sz="1000" dirty="0">
                 <a:solidFill>
-                  <a:srgbClr val="E4E7EC"/>
+                  <a:srgbClr val="E4E4E2"/>
                 </a:solidFill>
                 <a:latin typeface="Consolas" pitchFamily="34" charset="0"/>
                 <a:ea typeface="Consolas" pitchFamily="34" charset="-122"/>
@@ -4243,7 +4247,7 @@
             <a:r>
               <a:rPr lang="en-US" sz="1000" dirty="0">
                 <a:solidFill>
-                  <a:srgbClr val="FF8A80"/>
+                  <a:srgbClr val="FF6F6B"/>
                 </a:solidFill>
                 <a:latin typeface="Consolas" pitchFamily="34" charset="0"/>
                 <a:ea typeface="Consolas" pitchFamily="34" charset="-122"/>
@@ -4263,7 +4267,7 @@
             <a:r>
               <a:rPr lang="en-US" sz="1000" dirty="0">
                 <a:solidFill>
-                  <a:srgbClr val="E4E7EC"/>
+                  <a:srgbClr val="E4E4E2"/>
                 </a:solidFill>
                 <a:latin typeface="Consolas" pitchFamily="34" charset="0"/>
                 <a:ea typeface="Consolas" pitchFamily="34" charset="-122"/>
@@ -4283,7 +4287,7 @@
             <a:r>
               <a:rPr lang="en-US" sz="1000" dirty="0">
                 <a:solidFill>
-                  <a:srgbClr val="E4E7EC"/>
+                  <a:srgbClr val="E4E4E2"/>
                 </a:solidFill>
                 <a:latin typeface="Consolas" pitchFamily="34" charset="0"/>
                 <a:ea typeface="Consolas" pitchFamily="34" charset="-122"/>
@@ -4300,7 +4304,7 @@
             <a:r>
               <a:rPr lang="en-US" sz="1000" dirty="0">
                 <a:solidFill>
-                  <a:srgbClr val="F5B82E"/>
+                  <a:srgbClr val="F0B54A"/>
                 </a:solidFill>
                 <a:latin typeface="Consolas" pitchFamily="34" charset="0"/>
                 <a:ea typeface="Consolas" pitchFamily="34" charset="-122"/>
@@ -4317,7 +4321,7 @@
             <a:r>
               <a:rPr lang="en-US" sz="1000" dirty="0">
                 <a:solidFill>
-                  <a:srgbClr val="E4E7EC"/>
+                  <a:srgbClr val="E4E4E2"/>
                 </a:solidFill>
                 <a:latin typeface="Consolas" pitchFamily="34" charset="0"/>
                 <a:ea typeface="Consolas" pitchFamily="34" charset="-122"/>
@@ -4337,7 +4341,7 @@
             <a:r>
               <a:rPr lang="en-US" sz="1000" dirty="0">
                 <a:solidFill>
-                  <a:srgbClr val="E4E7EC"/>
+                  <a:srgbClr val="E4E4E2"/>
                 </a:solidFill>
                 <a:latin typeface="Consolas" pitchFamily="34" charset="0"/>
                 <a:ea typeface="Consolas" pitchFamily="34" charset="-122"/>
@@ -4354,7 +4358,7 @@
             <a:r>
               <a:rPr lang="en-US" sz="1000" dirty="0">
                 <a:solidFill>
-                  <a:srgbClr val="F5B82E"/>
+                  <a:srgbClr val="F0B54A"/>
                 </a:solidFill>
                 <a:latin typeface="Consolas" pitchFamily="34" charset="0"/>
                 <a:ea typeface="Consolas" pitchFamily="34" charset="-122"/>
@@ -4371,7 +4375,7 @@
             <a:r>
               <a:rPr lang="en-US" sz="1000" dirty="0">
                 <a:solidFill>
-                  <a:srgbClr val="E4E7EC"/>
+                  <a:srgbClr val="E4E4E2"/>
                 </a:solidFill>
                 <a:latin typeface="Consolas" pitchFamily="34" charset="0"/>
                 <a:ea typeface="Consolas" pitchFamily="34" charset="-122"/>
@@ -4437,9 +4441,13 @@
             <a:avLst/>
           </a:prstGeom>
           <a:solidFill>
-            <a:schemeClr val="tx1"/>
+            <a:srgbClr val="1E2025"/>
           </a:solidFill>
-          <a:ln/>
+          <a:ln w="9525">
+            <a:solidFill>
+              <a:srgbClr val="2E3138"/>
+            </a:solidFill>
+          </a:ln>
         </p:spPr>
       </p:sp>
       <p:sp>
@@ -4472,7 +4480,7 @@
             <a:r>
               <a:rPr lang="en-US" sz="1000" dirty="0">
                 <a:solidFill>
-                  <a:srgbClr val="E4E7EC"/>
+                  <a:srgbClr val="E4E4E2"/>
                 </a:solidFill>
                 <a:latin typeface="Consolas" pitchFamily="34" charset="0"/>
                 <a:ea typeface="Consolas" pitchFamily="34" charset="-122"/>
@@ -4489,7 +4497,7 @@
             <a:r>
               <a:rPr lang="en-US" sz="1000" dirty="0">
                 <a:solidFill>
-                  <a:srgbClr val="F5B82E"/>
+                  <a:srgbClr val="F0B54A"/>
                 </a:solidFill>
                 <a:latin typeface="Consolas" pitchFamily="34" charset="0"/>
                 <a:ea typeface="Consolas" pitchFamily="34" charset="-122"/>
@@ -4506,7 +4514,7 @@
             <a:r>
               <a:rPr lang="en-US" sz="1000" dirty="0">
                 <a:solidFill>
-                  <a:srgbClr val="E4E7EC"/>
+                  <a:srgbClr val="E4E4E2"/>
                 </a:solidFill>
                 <a:latin typeface="Consolas" pitchFamily="34" charset="0"/>
                 <a:ea typeface="Consolas" pitchFamily="34" charset="-122"/>
@@ -4526,7 +4534,7 @@
             <a:r>
               <a:rPr lang="en-US" sz="1000" dirty="0">
                 <a:solidFill>
-                  <a:srgbClr val="E4E7EC"/>
+                  <a:srgbClr val="E4E4E2"/>
                 </a:solidFill>
                 <a:latin typeface="Consolas" pitchFamily="34" charset="0"/>
                 <a:ea typeface="Consolas" pitchFamily="34" charset="-122"/>
@@ -4546,7 +4554,7 @@
             <a:r>
               <a:rPr lang="en-US" sz="1000" dirty="0">
                 <a:solidFill>
-                  <a:srgbClr val="E4E7EC"/>
+                  <a:srgbClr val="E4E4E2"/>
                 </a:solidFill>
                 <a:latin typeface="Consolas" pitchFamily="34" charset="0"/>
                 <a:ea typeface="Consolas" pitchFamily="34" charset="-122"/>
@@ -4566,7 +4574,7 @@
             <a:r>
               <a:rPr lang="en-US" sz="1000" dirty="0">
                 <a:solidFill>
-                  <a:srgbClr val="E4E7EC"/>
+                  <a:srgbClr val="E4E4E2"/>
                 </a:solidFill>
                 <a:latin typeface="Consolas" pitchFamily="34" charset="0"/>
                 <a:ea typeface="Consolas" pitchFamily="34" charset="-122"/>
@@ -4586,7 +4594,7 @@
             <a:r>
               <a:rPr lang="en-US" sz="1000" dirty="0">
                 <a:solidFill>
-                  <a:srgbClr val="E4E7EC"/>
+                  <a:srgbClr val="E4E4E2"/>
                 </a:solidFill>
                 <a:latin typeface="Consolas" pitchFamily="34" charset="0"/>
                 <a:ea typeface="Consolas" pitchFamily="34" charset="-122"/>
@@ -4606,7 +4614,7 @@
             <a:r>
               <a:rPr lang="en-US" sz="1000" dirty="0">
                 <a:solidFill>
-                  <a:srgbClr val="E4E7EC"/>
+                  <a:srgbClr val="E4E4E2"/>
                 </a:solidFill>
                 <a:latin typeface="Consolas" pitchFamily="34" charset="0"/>
                 <a:ea typeface="Consolas" pitchFamily="34" charset="-122"/>
@@ -4623,7 +4631,7 @@
             <a:r>
               <a:rPr lang="en-US" sz="1000" dirty="0">
                 <a:solidFill>
-                  <a:srgbClr val="F5B82E"/>
+                  <a:srgbClr val="F0B54A"/>
                 </a:solidFill>
                 <a:latin typeface="Consolas" pitchFamily="34" charset="0"/>
                 <a:ea typeface="Consolas" pitchFamily="34" charset="-122"/>
@@ -4640,7 +4648,7 @@
             <a:r>
               <a:rPr lang="en-US" sz="1000" dirty="0">
                 <a:solidFill>
-                  <a:srgbClr val="E4E7EC"/>
+                  <a:srgbClr val="E4E4E2"/>
                 </a:solidFill>
                 <a:latin typeface="Consolas" pitchFamily="34" charset="0"/>
                 <a:ea typeface="Consolas" pitchFamily="34" charset="-122"/>
@@ -4660,7 +4668,7 @@
             <a:r>
               <a:rPr lang="en-US" sz="1000" dirty="0">
                 <a:solidFill>
-                  <a:srgbClr val="E4E7EC"/>
+                  <a:srgbClr val="E4E4E2"/>
                 </a:solidFill>
                 <a:latin typeface="Consolas" pitchFamily="34" charset="0"/>
                 <a:ea typeface="Consolas" pitchFamily="34" charset="-122"/>
@@ -4677,7 +4685,7 @@
             <a:r>
               <a:rPr lang="en-US" sz="1000" dirty="0">
                 <a:solidFill>
-                  <a:srgbClr val="F5B82E"/>
+                  <a:srgbClr val="F0B54A"/>
                 </a:solidFill>
                 <a:latin typeface="Consolas" pitchFamily="34" charset="0"/>
                 <a:ea typeface="Consolas" pitchFamily="34" charset="-122"/>
@@ -4694,7 +4702,7 @@
             <a:r>
               <a:rPr lang="en-US" sz="1000" dirty="0">
                 <a:solidFill>
-                  <a:srgbClr val="E4E7EC"/>
+                  <a:srgbClr val="E4E4E2"/>
                 </a:solidFill>
                 <a:latin typeface="Consolas" pitchFamily="34" charset="0"/>
                 <a:ea typeface="Consolas" pitchFamily="34" charset="-122"/>
@@ -4772,7 +4780,7 @@
             <a:lvl1pPr>
               <a:defRPr sz="1000">
                 <a:solidFill>
-                  <a:srgbClr val="9AA1AC"/>
+                  <a:srgbClr val="868A91"/>
                 </a:solidFill>
                 <a:latin typeface="Consolas"/>
                 <a:ea typeface="Consolas"/>
@@ -5195,7 +5203,7 @@
             <a:lvl1pPr>
               <a:defRPr sz="1000">
                 <a:solidFill>
-                  <a:srgbClr val="9AA1AC"/>
+                  <a:srgbClr val="868A91"/>
                 </a:solidFill>
                 <a:latin typeface="Consolas"/>
                 <a:ea typeface="Consolas"/>
@@ -5651,7 +5659,7 @@
             <a:lvl1pPr>
               <a:defRPr sz="1000">
                 <a:solidFill>
-                  <a:srgbClr val="9AA1AC"/>
+                  <a:srgbClr val="868A91"/>
                 </a:solidFill>
                 <a:latin typeface="Consolas"/>
                 <a:ea typeface="Consolas"/>
@@ -5813,7 +5821,7 @@
           </a:prstGeom>
           <a:ln w="9525">
             <a:solidFill>
-              <a:srgbClr val="C3C8D0"/>
+              <a:srgbClr val="3A3D44"/>
             </a:solidFill>
             <a:prstDash val="solid"/>
           </a:ln>
@@ -5849,7 +5857,7 @@
                   <a:schemeClr val="tx1"/>
                 </a:solidFill>
               </a:rPr>
-              <a:t>Every phase</a:t>
+              <a:t>Every phase, live</a:t>
             </a:r>
             <a:endParaRPr lang="en-US" sz="1400" dirty="0"/>
           </a:p>
@@ -5885,7 +5893,7 @@
                   <a:schemeClr val="tx2"/>
                 </a:solidFill>
               </a:rPr>
-              <a:t>tokens, tree, types, core, JavaScript</a:t>
+              <a:t>click a phase in the pipeline to open it</a:t>
             </a:r>
             <a:endParaRPr lang="en-US" sz="1250" dirty="0"/>
           </a:p>
@@ -6065,7 +6073,7 @@
             <a:lvl1pPr>
               <a:defRPr sz="1000">
                 <a:solidFill>
-                  <a:srgbClr val="9AA1AC"/>
+                  <a:srgbClr val="868A91"/>
                 </a:solidFill>
                 <a:latin typeface="Consolas"/>
                 <a:ea typeface="Consolas"/>
@@ -6275,7 +6283,7 @@
                   <a:schemeClr val="tx2"/>
                 </a:solidFill>
               </a:rPr>
-              <a:t>Verified on Chrome 154 and Node 25; Firefox and Node 18 not tested separately</a:t>
+              <a:t>Verified on Chrome 155 and Node 25; Firefox and Node 18 not tested separately</a:t>
             </a:r>
             <a:endParaRPr lang="en-US" sz="1300" dirty="0"/>
           </a:p>
@@ -6477,7 +6485,7 @@
             <a:lvl1pPr>
               <a:defRPr sz="1000">
                 <a:solidFill>
-                  <a:srgbClr val="9AA1AC"/>
+                  <a:srgbClr val="868A91"/>
                 </a:solidFill>
                 <a:latin typeface="Consolas"/>
                 <a:ea typeface="Consolas"/>
@@ -6962,7 +6970,7 @@
             <a:lvl1pPr>
               <a:defRPr sz="1000">
                 <a:solidFill>
-                  <a:srgbClr val="9AA1AC"/>
+                  <a:srgbClr val="868A91"/>
                 </a:solidFill>
                 <a:latin typeface="Consolas"/>
                 <a:ea typeface="Consolas"/>
@@ -7099,9 +7107,13 @@
             <a:avLst/>
           </a:prstGeom>
           <a:solidFill>
-            <a:schemeClr val="tx1"/>
+            <a:srgbClr val="1E2025"/>
           </a:solidFill>
-          <a:ln/>
+          <a:ln w="9525">
+            <a:solidFill>
+              <a:srgbClr val="2E3138"/>
+            </a:solidFill>
+          </a:ln>
         </p:spPr>
       </p:sp>
       <p:sp>
@@ -7134,7 +7146,7 @@
             <a:r>
               <a:rPr lang="en-US" sz="1250" dirty="0">
                 <a:solidFill>
-                  <a:srgbClr val="8B93A1"/>
+                  <a:srgbClr val="8A8E96"/>
                 </a:solidFill>
                 <a:latin typeface="Consolas" pitchFamily="34" charset="0"/>
                 <a:ea typeface="Consolas" pitchFamily="34" charset="-122"/>
@@ -7154,7 +7166,7 @@
             <a:r>
               <a:rPr lang="en-US" sz="1250" dirty="0">
                 <a:solidFill>
-                  <a:srgbClr val="E4E7EC"/>
+                  <a:srgbClr val="E4E4E2"/>
                 </a:solidFill>
                 <a:latin typeface="Consolas" pitchFamily="34" charset="0"/>
                 <a:ea typeface="Consolas" pitchFamily="34" charset="-122"/>
@@ -7183,7 +7195,7 @@
             <a:r>
               <a:rPr lang="en-US" sz="1250" dirty="0">
                 <a:solidFill>
-                  <a:srgbClr val="8B93A1"/>
+                  <a:srgbClr val="8A8E96"/>
                 </a:solidFill>
                 <a:latin typeface="Consolas" pitchFamily="34" charset="0"/>
                 <a:ea typeface="Consolas" pitchFamily="34" charset="-122"/>
@@ -7203,7 +7215,7 @@
             <a:r>
               <a:rPr lang="en-US" sz="1250" dirty="0">
                 <a:solidFill>
-                  <a:srgbClr val="E4E7EC"/>
+                  <a:srgbClr val="E4E4E2"/>
                 </a:solidFill>
                 <a:latin typeface="Consolas" pitchFamily="34" charset="0"/>
                 <a:ea typeface="Consolas" pitchFamily="34" charset="-122"/>
@@ -7232,7 +7244,7 @@
             <a:r>
               <a:rPr lang="en-US" sz="1250" dirty="0">
                 <a:solidFill>
-                  <a:srgbClr val="8B93A1"/>
+                  <a:srgbClr val="8A8E96"/>
                 </a:solidFill>
                 <a:latin typeface="Consolas" pitchFamily="34" charset="0"/>
                 <a:ea typeface="Consolas" pitchFamily="34" charset="-122"/>
@@ -7252,7 +7264,7 @@
             <a:r>
               <a:rPr lang="en-US" sz="1250" dirty="0">
                 <a:solidFill>
-                  <a:srgbClr val="E4E7EC"/>
+                  <a:srgbClr val="E4E4E2"/>
                 </a:solidFill>
                 <a:latin typeface="Consolas" pitchFamily="34" charset="0"/>
                 <a:ea typeface="Consolas" pitchFamily="34" charset="-122"/>
@@ -7272,7 +7284,7 @@
             <a:r>
               <a:rPr lang="en-US" sz="1250" dirty="0">
                 <a:solidFill>
-                  <a:srgbClr val="F5B82E"/>
+                  <a:srgbClr val="F0B54A"/>
                 </a:solidFill>
                 <a:latin typeface="Consolas" pitchFamily="34" charset="0"/>
                 <a:ea typeface="Consolas" pitchFamily="34" charset="-122"/>
@@ -7301,7 +7313,7 @@
             <a:r>
               <a:rPr lang="en-US" sz="1250" dirty="0">
                 <a:solidFill>
-                  <a:srgbClr val="8B93A1"/>
+                  <a:srgbClr val="8A8E96"/>
                 </a:solidFill>
                 <a:latin typeface="Consolas" pitchFamily="34" charset="0"/>
                 <a:ea typeface="Consolas" pitchFamily="34" charset="-122"/>
@@ -7379,7 +7391,7 @@
             <a:lvl1pPr>
               <a:defRPr sz="1000">
                 <a:solidFill>
-                  <a:srgbClr val="9AA1AC"/>
+                  <a:srgbClr val="868A91"/>
                 </a:solidFill>
                 <a:latin typeface="Consolas"/>
                 <a:ea typeface="Consolas"/>
@@ -7531,7 +7543,7 @@
             <a:r>
               <a:rPr lang="en-US" sz="1150" dirty="0">
                 <a:solidFill>
-                  <a:srgbClr val="9AA1AC"/>
+                  <a:srgbClr val="868A91"/>
                 </a:solidFill>
                 <a:latin typeface="Consolas" pitchFamily="34" charset="0"/>
                 <a:ea typeface="Consolas" pitchFamily="34" charset="-122"/>
@@ -7565,7 +7577,7 @@
             <a:r>
               <a:rPr lang="en-US" sz="1150" dirty="0">
                 <a:solidFill>
-                  <a:srgbClr val="9AA1AC"/>
+                  <a:srgbClr val="868A91"/>
                 </a:solidFill>
                 <a:latin typeface="Consolas" pitchFamily="34" charset="0"/>
                 <a:ea typeface="Consolas" pitchFamily="34" charset="-122"/>
@@ -7599,7 +7611,7 @@
             <a:r>
               <a:rPr lang="en-US" sz="1150" dirty="0">
                 <a:solidFill>
-                  <a:srgbClr val="9AA1AC"/>
+                  <a:srgbClr val="868A91"/>
                 </a:solidFill>
                 <a:latin typeface="Consolas" pitchFamily="34" charset="0"/>
                 <a:ea typeface="Consolas" pitchFamily="34" charset="-122"/>
@@ -7633,7 +7645,7 @@
             <a:r>
               <a:rPr lang="en-US" sz="1150" dirty="0">
                 <a:solidFill>
-                  <a:srgbClr val="9AA1AC"/>
+                  <a:srgbClr val="868A91"/>
                 </a:solidFill>
                 <a:latin typeface="Consolas" pitchFamily="34" charset="0"/>
                 <a:ea typeface="Consolas" pitchFamily="34" charset="-122"/>
@@ -7667,7 +7679,7 @@
             <a:r>
               <a:rPr lang="en-US" sz="1150" dirty="0">
                 <a:solidFill>
-                  <a:srgbClr val="9AA1AC"/>
+                  <a:srgbClr val="868A91"/>
                 </a:solidFill>
                 <a:latin typeface="Consolas" pitchFamily="34" charset="0"/>
                 <a:ea typeface="Consolas" pitchFamily="34" charset="-122"/>
@@ -7701,7 +7713,7 @@
             <a:r>
               <a:rPr lang="en-US" sz="1150" dirty="0">
                 <a:solidFill>
-                  <a:srgbClr val="9AA1AC"/>
+                  <a:srgbClr val="868A91"/>
                 </a:solidFill>
                 <a:latin typeface="Consolas" pitchFamily="34" charset="0"/>
                 <a:ea typeface="Consolas" pitchFamily="34" charset="-122"/>
@@ -7735,7 +7747,7 @@
             <a:r>
               <a:rPr lang="en-US" sz="1150" dirty="0">
                 <a:solidFill>
-                  <a:srgbClr val="9AA1AC"/>
+                  <a:srgbClr val="868A91"/>
                 </a:solidFill>
                 <a:latin typeface="Consolas" pitchFamily="34" charset="0"/>
                 <a:ea typeface="Consolas" pitchFamily="34" charset="-122"/>
@@ -7769,7 +7781,7 @@
             <a:r>
               <a:rPr lang="en-US" sz="1150" dirty="0">
                 <a:solidFill>
-                  <a:srgbClr val="9AA1AC"/>
+                  <a:srgbClr val="868A91"/>
                 </a:solidFill>
                 <a:latin typeface="Consolas" pitchFamily="34" charset="0"/>
                 <a:ea typeface="Consolas" pitchFamily="34" charset="-122"/>
@@ -7803,7 +7815,7 @@
             <a:r>
               <a:rPr lang="en-US" sz="1150" dirty="0">
                 <a:solidFill>
-                  <a:srgbClr val="9AA1AC"/>
+                  <a:srgbClr val="868A91"/>
                 </a:solidFill>
                 <a:latin typeface="Consolas" pitchFamily="34" charset="0"/>
                 <a:ea typeface="Consolas" pitchFamily="34" charset="-122"/>
@@ -7859,7 +7871,7 @@
             <a:lvl1pPr>
               <a:defRPr sz="1000">
                 <a:solidFill>
-                  <a:srgbClr val="9AA1AC"/>
+                  <a:srgbClr val="868A91"/>
                 </a:solidFill>
                 <a:latin typeface="Consolas"/>
                 <a:ea typeface="Consolas"/>
@@ -7972,7 +7984,7 @@
             <a:r>
               <a:rPr lang="en-US" sz="6000" b="1" dirty="0">
                 <a:solidFill>
-                  <a:schemeClr val="bg1"/>
+                  <a:schemeClr val="tx1"/>
                 </a:solidFill>
               </a:rPr>
               <a:t>Questions?</a:t>
@@ -8010,7 +8022,7 @@
             <a:r>
               <a:rPr lang="en-US" sz="2000" dirty="0">
                 <a:solidFill>
-                  <a:srgbClr val="C9CED6"/>
+                  <a:srgbClr val="B6B8BC"/>
                 </a:solidFill>
               </a:rPr>
               <a:t>Antra  ·  24BDS0066</a:t>
@@ -8066,7 +8078,7 @@
             <a:r>
               <a:rPr lang="en-US" sz="1800" dirty="0">
                 <a:solidFill>
-                  <a:srgbClr val="FFFFFF"/>
+                  <a:srgbClr val="E4E4E2"/>
                 </a:solidFill>
                 <a:latin typeface="Consolas" pitchFamily="34" charset="0"/>
                 <a:ea typeface="Consolas" pitchFamily="34" charset="-122"/>
@@ -8080,7 +8092,7 @@
             <a:r>
               <a:rPr lang="en-US" sz="1800" dirty="0">
                 <a:solidFill>
-                  <a:srgbClr val="15181D"/>
+                  <a:srgbClr val="1A1305"/>
                 </a:solidFill>
                 <a:latin typeface="Consolas" pitchFamily="34" charset="0"/>
                 <a:ea typeface="Consolas" pitchFamily="34" charset="-122"/>
@@ -8094,7 +8106,7 @@
             <a:r>
               <a:rPr lang="en-US" sz="1800" dirty="0">
                 <a:solidFill>
-                  <a:srgbClr val="FFFFFF"/>
+                  <a:srgbClr val="E4E4E2"/>
                 </a:solidFill>
                 <a:latin typeface="Consolas" pitchFamily="34" charset="0"/>
                 <a:ea typeface="Consolas" pitchFamily="34" charset="-122"/>
@@ -8123,7 +8135,7 @@
           <a:noFill/>
           <a:ln w="12700">
             <a:solidFill>
-              <a:srgbClr val="F5B82E"/>
+              <a:srgbClr val="F0B54A"/>
             </a:solidFill>
             <a:prstDash val="solid"/>
           </a:ln>
@@ -8631,7 +8643,7 @@
           <a:noFill/>
           <a:ln w="9525">
             <a:solidFill>
-              <a:srgbClr val="DADDE2"/>
+              <a:srgbClr val="2A2D33"/>
             </a:solidFill>
             <a:prstDash val="solid"/>
           </a:ln>
@@ -8706,7 +8718,7 @@
             <a:lvl1pPr>
               <a:defRPr sz="1000">
                 <a:solidFill>
-                  <a:srgbClr val="9AA1AC"/>
+                  <a:srgbClr val="868A91"/>
                 </a:solidFill>
                 <a:latin typeface="Consolas"/>
                 <a:ea typeface="Consolas"/>
@@ -9143,11 +9155,11 @@
             <a:avLst/>
           </a:prstGeom>
           <a:solidFill>
-            <a:schemeClr val="tx1"/>
+            <a:srgbClr val="1E2025"/>
           </a:solidFill>
           <a:ln w="9525">
             <a:solidFill>
-              <a:srgbClr val="15181D"/>
+              <a:srgbClr val="4A4E55"/>
             </a:solidFill>
             <a:prstDash val="solid"/>
           </a:ln>
@@ -9180,7 +9192,7 @@
             <a:r>
               <a:rPr lang="en-US" sz="1100" b="1" dirty="0">
                 <a:solidFill>
-                  <a:schemeClr val="bg1"/>
+                  <a:schemeClr val="tx1"/>
                 </a:solidFill>
                 <a:latin typeface="Consolas" pitchFamily="34" charset="0"/>
                 <a:ea typeface="Consolas" pitchFamily="34" charset="-122"/>
@@ -9243,11 +9255,11 @@
             <a:avLst/>
           </a:prstGeom>
           <a:solidFill>
-            <a:schemeClr val="tx1"/>
+            <a:srgbClr val="1E2025"/>
           </a:solidFill>
           <a:ln w="9525">
             <a:solidFill>
-              <a:srgbClr val="15181D"/>
+              <a:srgbClr val="4A4E55"/>
             </a:solidFill>
             <a:prstDash val="solid"/>
           </a:ln>
@@ -9280,7 +9292,7 @@
             <a:r>
               <a:rPr lang="en-US" sz="1100" b="1" dirty="0">
                 <a:solidFill>
-                  <a:schemeClr val="bg1"/>
+                  <a:schemeClr val="tx1"/>
                 </a:solidFill>
                 <a:latin typeface="Consolas" pitchFamily="34" charset="0"/>
                 <a:ea typeface="Consolas" pitchFamily="34" charset="-122"/>
@@ -9343,11 +9355,11 @@
             <a:avLst/>
           </a:prstGeom>
           <a:solidFill>
-            <a:schemeClr val="tx1"/>
+            <a:srgbClr val="1E2025"/>
           </a:solidFill>
           <a:ln w="9525">
             <a:solidFill>
-              <a:srgbClr val="15181D"/>
+              <a:srgbClr val="4A4E55"/>
             </a:solidFill>
             <a:prstDash val="solid"/>
           </a:ln>
@@ -9380,7 +9392,7 @@
             <a:r>
               <a:rPr lang="en-US" sz="1100" b="1" dirty="0">
                 <a:solidFill>
-                  <a:schemeClr val="bg1"/>
+                  <a:schemeClr val="tx1"/>
                 </a:solidFill>
                 <a:latin typeface="Consolas" pitchFamily="34" charset="0"/>
                 <a:ea typeface="Consolas" pitchFamily="34" charset="-122"/>
@@ -9443,11 +9455,11 @@
             <a:avLst/>
           </a:prstGeom>
           <a:solidFill>
-            <a:schemeClr val="tx1"/>
+            <a:srgbClr val="1E2025"/>
           </a:solidFill>
           <a:ln w="9525">
             <a:solidFill>
-              <a:srgbClr val="15181D"/>
+              <a:srgbClr val="4A4E55"/>
             </a:solidFill>
             <a:prstDash val="solid"/>
           </a:ln>
@@ -9480,7 +9492,7 @@
             <a:r>
               <a:rPr lang="en-US" sz="1100" b="1" dirty="0">
                 <a:solidFill>
-                  <a:schemeClr val="bg1"/>
+                  <a:schemeClr val="tx1"/>
                 </a:solidFill>
                 <a:latin typeface="Consolas" pitchFamily="34" charset="0"/>
                 <a:ea typeface="Consolas" pitchFamily="34" charset="-122"/>
@@ -9543,11 +9555,11 @@
             <a:avLst/>
           </a:prstGeom>
           <a:solidFill>
-            <a:schemeClr val="tx1"/>
+            <a:srgbClr val="1E2025"/>
           </a:solidFill>
           <a:ln w="9525">
             <a:solidFill>
-              <a:srgbClr val="15181D"/>
+              <a:srgbClr val="4A4E55"/>
             </a:solidFill>
             <a:prstDash val="solid"/>
           </a:ln>
@@ -9580,7 +9592,7 @@
             <a:r>
               <a:rPr lang="en-US" sz="1100" b="1" dirty="0">
                 <a:solidFill>
-                  <a:schemeClr val="bg1"/>
+                  <a:schemeClr val="tx1"/>
                 </a:solidFill>
                 <a:latin typeface="Consolas" pitchFamily="34" charset="0"/>
                 <a:ea typeface="Consolas" pitchFamily="34" charset="-122"/>
@@ -9643,11 +9655,11 @@
             <a:avLst/>
           </a:prstGeom>
           <a:solidFill>
-            <a:schemeClr val="tx1"/>
+            <a:srgbClr val="1E2025"/>
           </a:solidFill>
           <a:ln w="9525">
             <a:solidFill>
-              <a:srgbClr val="15181D"/>
+              <a:srgbClr val="4A4E55"/>
             </a:solidFill>
             <a:prstDash val="solid"/>
           </a:ln>
@@ -9680,7 +9692,7 @@
             <a:r>
               <a:rPr lang="en-US" sz="1100" b="1" dirty="0">
                 <a:solidFill>
-                  <a:schemeClr val="bg1"/>
+                  <a:schemeClr val="tx1"/>
                 </a:solidFill>
                 <a:latin typeface="Consolas" pitchFamily="34" charset="0"/>
                 <a:ea typeface="Consolas" pitchFamily="34" charset="-122"/>
@@ -9743,11 +9755,11 @@
             <a:avLst/>
           </a:prstGeom>
           <a:solidFill>
-            <a:schemeClr val="tx1"/>
+            <a:srgbClr val="1E2025"/>
           </a:solidFill>
           <a:ln w="9525">
             <a:solidFill>
-              <a:srgbClr val="15181D"/>
+              <a:srgbClr val="4A4E55"/>
             </a:solidFill>
             <a:prstDash val="solid"/>
           </a:ln>
@@ -9780,7 +9792,7 @@
             <a:r>
               <a:rPr lang="en-US" sz="1100" b="1" dirty="0">
                 <a:solidFill>
-                  <a:schemeClr val="bg1"/>
+                  <a:schemeClr val="tx1"/>
                 </a:solidFill>
                 <a:latin typeface="Consolas" pitchFamily="34" charset="0"/>
                 <a:ea typeface="Consolas" pitchFamily="34" charset="-122"/>
@@ -9843,11 +9855,11 @@
             <a:avLst/>
           </a:prstGeom>
           <a:solidFill>
-            <a:schemeClr val="tx1"/>
+            <a:srgbClr val="1E2025"/>
           </a:solidFill>
           <a:ln w="9525">
             <a:solidFill>
-              <a:srgbClr val="15181D"/>
+              <a:srgbClr val="4A4E55"/>
             </a:solidFill>
             <a:prstDash val="solid"/>
           </a:ln>
@@ -9880,7 +9892,7 @@
             <a:r>
               <a:rPr lang="en-US" sz="1100" b="1" dirty="0">
                 <a:solidFill>
-                  <a:schemeClr val="bg1"/>
+                  <a:schemeClr val="tx1"/>
                 </a:solidFill>
                 <a:latin typeface="Consolas" pitchFamily="34" charset="0"/>
                 <a:ea typeface="Consolas" pitchFamily="34" charset="-122"/>
@@ -9958,7 +9970,7 @@
             <a:lvl1pPr>
               <a:defRPr sz="1000">
                 <a:solidFill>
-                  <a:srgbClr val="9AA1AC"/>
+                  <a:srgbClr val="868A91"/>
                 </a:solidFill>
                 <a:latin typeface="Consolas"/>
                 <a:ea typeface="Consolas"/>
@@ -10132,7 +10144,7 @@
                     </a:lnT>
                     <a:lnB w="12700" cap="flat" cmpd="sng" algn="ctr">
                       <a:solidFill>
-                        <a:srgbClr val="15181D"/>
+                        <a:srgbClr val="4A4E55"/>
                       </a:solidFill>
                       <a:prstDash val="solid"/>
                       <a:round/>
@@ -10152,7 +10164,7 @@
                       <a:r>
                         <a:rPr lang="en-US" sz="1100" b="1" dirty="0">
                           <a:solidFill>
-                            <a:srgbClr val="4A5260"/>
+                            <a:srgbClr val="A9ACB2"/>
                           </a:solidFill>
                         </a:rPr>
                         <a:t>Criterion</a:t>
@@ -10172,7 +10184,7 @@
                     </a:lnT>
                     <a:lnB w="12700" cap="flat" cmpd="sng" algn="ctr">
                       <a:solidFill>
-                        <a:srgbClr val="15181D"/>
+                        <a:srgbClr val="4A4E55"/>
                       </a:solidFill>
                       <a:prstDash val="solid"/>
                       <a:round/>
@@ -10192,7 +10204,7 @@
                       <a:r>
                         <a:rPr lang="en-US" sz="1100" b="1" dirty="0">
                           <a:solidFill>
-                            <a:srgbClr val="4A5260"/>
+                            <a:srgbClr val="A9ACB2"/>
                           </a:solidFill>
                         </a:rPr>
                         <a:t>Result</a:t>
@@ -10212,7 +10224,7 @@
                     </a:lnT>
                     <a:lnB w="12700" cap="flat" cmpd="sng" algn="ctr">
                       <a:solidFill>
-                        <a:srgbClr val="15181D"/>
+                        <a:srgbClr val="4A4E55"/>
                       </a:solidFill>
                       <a:prstDash val="solid"/>
                       <a:round/>
@@ -10232,7 +10244,7 @@
                       <a:r>
                         <a:rPr lang="en-US" sz="1100" b="1" dirty="0">
                           <a:solidFill>
-                            <a:srgbClr val="4A5260"/>
+                            <a:srgbClr val="A9ACB2"/>
                           </a:solidFill>
                         </a:rPr>
                         <a:t>Evidence</a:t>
@@ -10252,7 +10264,7 @@
                     </a:lnT>
                     <a:lnB w="12700" cap="flat" cmpd="sng" algn="ctr">
                       <a:solidFill>
-                        <a:srgbClr val="15181D"/>
+                        <a:srgbClr val="4A4E55"/>
                       </a:solidFill>
                       <a:prstDash val="solid"/>
                       <a:round/>
@@ -10274,7 +10286,7 @@
                       <a:r>
                         <a:rPr lang="en-US" sz="1250" dirty="0">
                           <a:solidFill>
-                            <a:srgbClr val="15181D"/>
+                            <a:srgbClr val="E4E4E2"/>
                           </a:solidFill>
                           <a:latin typeface="Consolas" pitchFamily="34" charset="0"/>
                           <a:ea typeface="Consolas" pitchFamily="34" charset="-122"/>
@@ -10301,7 +10313,7 @@
                     </a:lnT>
                     <a:lnB w="9525" cap="flat" cmpd="sng" algn="ctr">
                       <a:solidFill>
-                        <a:srgbClr val="DADDE2"/>
+                        <a:srgbClr val="2A2D33"/>
                       </a:solidFill>
                       <a:prstDash val="solid"/>
                       <a:round/>
@@ -10321,7 +10333,7 @@
                       <a:r>
                         <a:rPr lang="en-US" sz="1250" dirty="0">
                           <a:solidFill>
-                            <a:srgbClr val="15181D"/>
+                            <a:srgbClr val="E4E4E2"/>
                           </a:solidFill>
                         </a:rPr>
                         <a:t>Benchmarks print exactly their expected output</a:t>
@@ -10341,7 +10353,7 @@
                     </a:lnT>
                     <a:lnB w="9525" cap="flat" cmpd="sng" algn="ctr">
                       <a:solidFill>
-                        <a:srgbClr val="DADDE2"/>
+                        <a:srgbClr val="2A2D33"/>
                       </a:solidFill>
                       <a:prstDash val="solid"/>
                       <a:round/>
@@ -10361,7 +10373,7 @@
                       <a:r>
                         <a:rPr lang="en-US" sz="1250" b="1" dirty="0">
                           <a:solidFill>
-                            <a:srgbClr val="1F7A4D"/>
+                            <a:srgbClr val="5CC98A"/>
                           </a:solidFill>
                         </a:rPr>
                         <a:t>4 of 4</a:t>
@@ -10381,7 +10393,7 @@
                     </a:lnT>
                     <a:lnB w="9525" cap="flat" cmpd="sng" algn="ctr">
                       <a:solidFill>
-                        <a:srgbClr val="DADDE2"/>
+                        <a:srgbClr val="2A2D33"/>
                       </a:solidFill>
                       <a:prstDash val="solid"/>
                       <a:round/>
@@ -10401,7 +10413,7 @@
                       <a:r>
                         <a:rPr lang="en-US" sz="1100" dirty="0">
                           <a:solidFill>
-                            <a:srgbClr val="15181D"/>
+                            <a:srgbClr val="E4E4E2"/>
                           </a:solidFill>
                           <a:latin typeface="Consolas" pitchFamily="34" charset="0"/>
                           <a:ea typeface="Consolas" pitchFamily="34" charset="-122"/>
@@ -10428,7 +10440,7 @@
                     </a:lnT>
                     <a:lnB w="9525" cap="flat" cmpd="sng" algn="ctr">
                       <a:solidFill>
-                        <a:srgbClr val="DADDE2"/>
+                        <a:srgbClr val="2A2D33"/>
                       </a:solidFill>
                       <a:prstDash val="solid"/>
                       <a:round/>
@@ -10450,7 +10462,7 @@
                       <a:r>
                         <a:rPr lang="en-US" sz="1250" dirty="0">
                           <a:solidFill>
-                            <a:srgbClr val="15181D"/>
+                            <a:srgbClr val="E4E4E2"/>
                           </a:solidFill>
                           <a:latin typeface="Consolas" pitchFamily="34" charset="0"/>
                           <a:ea typeface="Consolas" pitchFamily="34" charset="-122"/>
@@ -10477,7 +10489,7 @@
                     </a:lnT>
                     <a:lnB w="9525" cap="flat" cmpd="sng" algn="ctr">
                       <a:solidFill>
-                        <a:srgbClr val="DADDE2"/>
+                        <a:srgbClr val="2A2D33"/>
                       </a:solidFill>
                       <a:prstDash val="solid"/>
                       <a:round/>
@@ -10497,7 +10509,7 @@
                       <a:r>
                         <a:rPr lang="en-US" sz="1250" dirty="0">
                           <a:solidFill>
-                            <a:srgbClr val="15181D"/>
+                            <a:srgbClr val="E4E4E2"/>
                           </a:solidFill>
                         </a:rPr>
                         <a:t>Breakpoints on ≥ 10 .tth statements halt there in Chrome DevTools</a:t>
@@ -10517,7 +10529,7 @@
                     </a:lnT>
                     <a:lnB w="9525" cap="flat" cmpd="sng" algn="ctr">
                       <a:solidFill>
-                        <a:srgbClr val="DADDE2"/>
+                        <a:srgbClr val="2A2D33"/>
                       </a:solidFill>
                       <a:prstDash val="solid"/>
                       <a:round/>
@@ -10537,7 +10549,7 @@
                       <a:r>
                         <a:rPr lang="en-US" sz="1250" b="1" dirty="0">
                           <a:solidFill>
-                            <a:srgbClr val="1F7A4D"/>
+                            <a:srgbClr val="5CC98A"/>
                           </a:solidFill>
                         </a:rPr>
                         <a:t>20 of 20</a:t>
@@ -10557,7 +10569,7 @@
                     </a:lnT>
                     <a:lnB w="9525" cap="flat" cmpd="sng" algn="ctr">
                       <a:solidFill>
-                        <a:srgbClr val="DADDE2"/>
+                        <a:srgbClr val="2A2D33"/>
                       </a:solidFill>
                       <a:prstDash val="solid"/>
                       <a:round/>
@@ -10577,7 +10589,7 @@
                       <a:r>
                         <a:rPr lang="en-US" sz="1100" dirty="0">
                           <a:solidFill>
-                            <a:srgbClr val="15181D"/>
+                            <a:srgbClr val="E4E4E2"/>
                           </a:solidFill>
                           <a:latin typeface="Consolas" pitchFamily="34" charset="0"/>
                           <a:ea typeface="Consolas" pitchFamily="34" charset="-122"/>
@@ -10604,7 +10616,7 @@
                     </a:lnT>
                     <a:lnB w="9525" cap="flat" cmpd="sng" algn="ctr">
                       <a:solidFill>
-                        <a:srgbClr val="DADDE2"/>
+                        <a:srgbClr val="2A2D33"/>
                       </a:solidFill>
                       <a:prstDash val="solid"/>
                       <a:round/>
@@ -10626,7 +10638,7 @@
                       <a:r>
                         <a:rPr lang="en-US" sz="1250" dirty="0">
                           <a:solidFill>
-                            <a:srgbClr val="15181D"/>
+                            <a:srgbClr val="E4E4E2"/>
                           </a:solidFill>
                           <a:latin typeface="Consolas" pitchFamily="34" charset="0"/>
                           <a:ea typeface="Consolas" pitchFamily="34" charset="-122"/>
@@ -10653,7 +10665,7 @@
                     </a:lnT>
                     <a:lnB w="9525" cap="flat" cmpd="sng" algn="ctr">
                       <a:solidFill>
-                        <a:srgbClr val="DADDE2"/>
+                        <a:srgbClr val="2A2D33"/>
                       </a:solidFill>
                       <a:prstDash val="solid"/>
                       <a:round/>
@@ -10673,7 +10685,7 @@
                       <a:r>
                         <a:rPr lang="en-US" sz="1250" dirty="0">
                           <a:solidFill>
-                            <a:srgbClr val="15181D"/>
+                            <a:srgbClr val="E4E4E2"/>
                           </a:solidFill>
                         </a:rPr>
                         <a:t>Mapping table round-trips through an independent decoder</a:t>
@@ -10693,7 +10705,7 @@
                     </a:lnT>
                     <a:lnB w="9525" cap="flat" cmpd="sng" algn="ctr">
                       <a:solidFill>
-                        <a:srgbClr val="DADDE2"/>
+                        <a:srgbClr val="2A2D33"/>
                       </a:solidFill>
                       <a:prstDash val="solid"/>
                       <a:round/>
@@ -10713,7 +10725,7 @@
                       <a:r>
                         <a:rPr lang="en-US" sz="1250" b="1" dirty="0">
                           <a:solidFill>
-                            <a:srgbClr val="1F7A4D"/>
+                            <a:srgbClr val="5CC98A"/>
                           </a:solidFill>
                         </a:rPr>
                         <a:t>100%</a:t>
@@ -10733,7 +10745,7 @@
                     </a:lnT>
                     <a:lnB w="9525" cap="flat" cmpd="sng" algn="ctr">
                       <a:solidFill>
-                        <a:srgbClr val="DADDE2"/>
+                        <a:srgbClr val="2A2D33"/>
                       </a:solidFill>
                       <a:prstDash val="solid"/>
                       <a:round/>
@@ -10753,7 +10765,7 @@
                       <a:r>
                         <a:rPr lang="en-US" sz="1100" dirty="0">
                           <a:solidFill>
-                            <a:srgbClr val="15181D"/>
+                            <a:srgbClr val="E4E4E2"/>
                           </a:solidFill>
                           <a:latin typeface="Consolas" pitchFamily="34" charset="0"/>
                           <a:ea typeface="Consolas" pitchFamily="34" charset="-122"/>
@@ -10780,7 +10792,7 @@
                     </a:lnT>
                     <a:lnB w="9525" cap="flat" cmpd="sng" algn="ctr">
                       <a:solidFill>
-                        <a:srgbClr val="DADDE2"/>
+                        <a:srgbClr val="2A2D33"/>
                       </a:solidFill>
                       <a:prstDash val="solid"/>
                       <a:round/>
@@ -10802,7 +10814,7 @@
                       <a:r>
                         <a:rPr lang="en-US" sz="1250" dirty="0">
                           <a:solidFill>
-                            <a:srgbClr val="15181D"/>
+                            <a:srgbClr val="E4E4E2"/>
                           </a:solidFill>
                           <a:latin typeface="Consolas" pitchFamily="34" charset="0"/>
                           <a:ea typeface="Consolas" pitchFamily="34" charset="-122"/>
@@ -10829,7 +10841,7 @@
                     </a:lnT>
                     <a:lnB w="9525" cap="flat" cmpd="sng" algn="ctr">
                       <a:solidFill>
-                        <a:srgbClr val="DADDE2"/>
+                        <a:srgbClr val="2A2D33"/>
                       </a:solidFill>
                       <a:prstDash val="solid"/>
                       <a:round/>
@@ -10849,7 +10861,7 @@
                       <a:r>
                         <a:rPr lang="en-US" sz="1250" dirty="0">
                           <a:solidFill>
-                            <a:srgbClr val="15181D"/>
+                            <a:srgbClr val="E4E4E2"/>
                           </a:solidFill>
                         </a:rPr>
                         <a:t>Five semantic errors reported in one run, with carets</a:t>
@@ -10869,7 +10881,7 @@
                     </a:lnT>
                     <a:lnB w="9525" cap="flat" cmpd="sng" algn="ctr">
                       <a:solidFill>
-                        <a:srgbClr val="DADDE2"/>
+                        <a:srgbClr val="2A2D33"/>
                       </a:solidFill>
                       <a:prstDash val="solid"/>
                       <a:round/>
@@ -10889,7 +10901,7 @@
                       <a:r>
                         <a:rPr lang="en-US" sz="1250" b="1" dirty="0">
                           <a:solidFill>
-                            <a:srgbClr val="1F7A4D"/>
+                            <a:srgbClr val="5CC98A"/>
                           </a:solidFill>
                         </a:rPr>
                         <a:t>8 of 8</a:t>
@@ -10909,7 +10921,7 @@
                     </a:lnT>
                     <a:lnB w="9525" cap="flat" cmpd="sng" algn="ctr">
                       <a:solidFill>
-                        <a:srgbClr val="DADDE2"/>
+                        <a:srgbClr val="2A2D33"/>
                       </a:solidFill>
                       <a:prstDash val="solid"/>
                       <a:round/>
@@ -10929,7 +10941,7 @@
                       <a:r>
                         <a:rPr lang="en-US" sz="1100" dirty="0">
                           <a:solidFill>
-                            <a:srgbClr val="15181D"/>
+                            <a:srgbClr val="E4E4E2"/>
                           </a:solidFill>
                           <a:latin typeface="Consolas" pitchFamily="34" charset="0"/>
                           <a:ea typeface="Consolas" pitchFamily="34" charset="-122"/>
@@ -10956,7 +10968,7 @@
                     </a:lnT>
                     <a:lnB w="9525" cap="flat" cmpd="sng" algn="ctr">
                       <a:solidFill>
-                        <a:srgbClr val="DADDE2"/>
+                        <a:srgbClr val="2A2D33"/>
                       </a:solidFill>
                       <a:prstDash val="solid"/>
                       <a:round/>
@@ -10978,7 +10990,7 @@
                       <a:r>
                         <a:rPr lang="en-US" sz="1250" dirty="0">
                           <a:solidFill>
-                            <a:srgbClr val="15181D"/>
+                            <a:srgbClr val="E4E4E2"/>
                           </a:solidFill>
                           <a:latin typeface="Consolas" pitchFamily="34" charset="0"/>
                           <a:ea typeface="Consolas" pitchFamily="34" charset="-122"/>
@@ -11005,7 +11017,7 @@
                     </a:lnT>
                     <a:lnB w="9525" cap="flat" cmpd="sng" algn="ctr">
                       <a:solidFill>
-                        <a:srgbClr val="DADDE2"/>
+                        <a:srgbClr val="2A2D33"/>
                       </a:solidFill>
                       <a:prstDash val="solid"/>
                       <a:round/>
@@ -11025,7 +11037,7 @@
                       <a:r>
                         <a:rPr lang="en-US" sz="1250" dirty="0">
                           <a:solidFill>
-                            <a:srgbClr val="15181D"/>
+                            <a:srgbClr val="E4E4E2"/>
                           </a:solidFill>
                         </a:rPr>
                         <a:t>Browser stack trace names the original file and line</a:t>
@@ -11045,7 +11057,7 @@
                     </a:lnT>
                     <a:lnB w="9525" cap="flat" cmpd="sng" algn="ctr">
                       <a:solidFill>
-                        <a:srgbClr val="DADDE2"/>
+                        <a:srgbClr val="2A2D33"/>
                       </a:solidFill>
                       <a:prstDash val="solid"/>
                       <a:round/>
@@ -11065,7 +11077,7 @@
                       <a:r>
                         <a:rPr lang="en-US" sz="1250" b="1" dirty="0">
                           <a:solidFill>
-                            <a:srgbClr val="1F7A4D"/>
+                            <a:srgbClr val="5CC98A"/>
                           </a:solidFill>
                         </a:rPr>
                         <a:t>stack-overflow.tth:6</a:t>
@@ -11085,7 +11097,7 @@
                     </a:lnT>
                     <a:lnB w="9525" cap="flat" cmpd="sng" algn="ctr">
                       <a:solidFill>
-                        <a:srgbClr val="DADDE2"/>
+                        <a:srgbClr val="2A2D33"/>
                       </a:solidFill>
                       <a:prstDash val="solid"/>
                       <a:round/>
@@ -11105,7 +11117,7 @@
                       <a:r>
                         <a:rPr lang="en-US" sz="1100" dirty="0">
                           <a:solidFill>
-                            <a:srgbClr val="15181D"/>
+                            <a:srgbClr val="E4E4E2"/>
                           </a:solidFill>
                         </a:rPr>
                         <a:t>screenshot, DevTools console</a:t>
@@ -11125,7 +11137,7 @@
                     </a:lnT>
                     <a:lnB w="9525" cap="flat" cmpd="sng" algn="ctr">
                       <a:solidFill>
-                        <a:srgbClr val="DADDE2"/>
+                        <a:srgbClr val="2A2D33"/>
                       </a:solidFill>
                       <a:prstDash val="solid"/>
                       <a:round/>
@@ -11147,7 +11159,7 @@
                       <a:r>
                         <a:rPr lang="en-US" sz="1250" dirty="0">
                           <a:solidFill>
-                            <a:srgbClr val="15181D"/>
+                            <a:srgbClr val="E4E4E2"/>
                           </a:solidFill>
                           <a:latin typeface="Consolas" pitchFamily="34" charset="0"/>
                           <a:ea typeface="Consolas" pitchFamily="34" charset="-122"/>
@@ -11174,7 +11186,7 @@
                     </a:lnT>
                     <a:lnB w="9525" cap="flat" cmpd="sng" algn="ctr">
                       <a:solidFill>
-                        <a:srgbClr val="DADDE2"/>
+                        <a:srgbClr val="2A2D33"/>
                       </a:solidFill>
                       <a:prstDash val="solid"/>
                       <a:round/>
@@ -11194,7 +11206,7 @@
                       <a:r>
                         <a:rPr lang="en-US" sz="1250" dirty="0">
                           <a:solidFill>
-                            <a:srgbClr val="15181D"/>
+                            <a:srgbClr val="E4E4E2"/>
                           </a:solidFill>
                         </a:rPr>
                         <a:t>Mapping retention recorded at -O0 and -O1</a:t>
@@ -11214,7 +11226,7 @@
                     </a:lnT>
                     <a:lnB w="9525" cap="flat" cmpd="sng" algn="ctr">
                       <a:solidFill>
-                        <a:srgbClr val="DADDE2"/>
+                        <a:srgbClr val="2A2D33"/>
                       </a:solidFill>
                       <a:prstDash val="solid"/>
                       <a:round/>
@@ -11234,7 +11246,7 @@
                       <a:r>
                         <a:rPr lang="en-US" sz="1250" b="1" dirty="0">
                           <a:solidFill>
-                            <a:srgbClr val="1F7A4D"/>
+                            <a:srgbClr val="5CC98A"/>
                           </a:solidFill>
                         </a:rPr>
                         <a:t>5 programs</a:t>
@@ -11254,7 +11266,7 @@
                     </a:lnT>
                     <a:lnB w="9525" cap="flat" cmpd="sng" algn="ctr">
                       <a:solidFill>
-                        <a:srgbClr val="DADDE2"/>
+                        <a:srgbClr val="2A2D33"/>
                       </a:solidFill>
                       <a:prstDash val="solid"/>
                       <a:round/>
@@ -11274,7 +11286,7 @@
                       <a:r>
                         <a:rPr lang="en-US" sz="1100" dirty="0">
                           <a:solidFill>
-                            <a:srgbClr val="15181D"/>
+                            <a:srgbClr val="E4E4E2"/>
                           </a:solidFill>
                           <a:latin typeface="Consolas" pitchFamily="34" charset="0"/>
                           <a:ea typeface="Consolas" pitchFamily="34" charset="-122"/>
@@ -11301,7 +11313,7 @@
                     </a:lnT>
                     <a:lnB w="9525" cap="flat" cmpd="sng" algn="ctr">
                       <a:solidFill>
-                        <a:srgbClr val="DADDE2"/>
+                        <a:srgbClr val="2A2D33"/>
                       </a:solidFill>
                       <a:prstDash val="solid"/>
                       <a:round/>
@@ -11345,7 +11357,7 @@
             <a:lvl1pPr>
               <a:defRPr sz="1000">
                 <a:solidFill>
-                  <a:srgbClr val="9AA1AC"/>
+                  <a:srgbClr val="868A91"/>
                 </a:solidFill>
                 <a:latin typeface="Consolas"/>
                 <a:ea typeface="Consolas"/>
@@ -11560,11 +11572,11 @@
             <a:avLst/>
           </a:prstGeom>
           <a:solidFill>
-            <a:schemeClr val="tx1"/>
+            <a:srgbClr val="1E2025"/>
           </a:solidFill>
           <a:ln w="12700">
             <a:solidFill>
-              <a:srgbClr val="15181D"/>
+              <a:srgbClr val="4A4E55"/>
             </a:solidFill>
             <a:prstDash val="solid"/>
           </a:ln>
@@ -11597,7 +11609,7 @@
             <a:r>
               <a:rPr lang="en-US" sz="1300" b="1" dirty="0">
                 <a:solidFill>
-                  <a:schemeClr val="bg1"/>
+                  <a:schemeClr val="tx1"/>
                 </a:solidFill>
               </a:rPr>
               <a:t>Lexer</a:t>
@@ -11611,7 +11623,7 @@
             <a:r>
               <a:rPr lang="en-US" sz="1000" dirty="0">
                 <a:solidFill>
-                  <a:schemeClr val="bg1"/>
+                  <a:schemeClr val="tx1"/>
                 </a:solidFill>
                 <a:latin typeface="Consolas" pitchFamily="34" charset="0"/>
                 <a:ea typeface="Consolas" pitchFamily="34" charset="-122"/>
@@ -11640,7 +11652,7 @@
           <a:noFill/>
           <a:ln w="12700">
             <a:solidFill>
-              <a:srgbClr val="4A5260"/>
+              <a:srgbClr val="5A5E66"/>
             </a:solidFill>
             <a:prstDash val="solid"/>
             <a:tailEnd type="triangle"/>
@@ -11662,11 +11674,11 @@
             <a:avLst/>
           </a:prstGeom>
           <a:solidFill>
-            <a:schemeClr val="tx1"/>
+            <a:srgbClr val="1E2025"/>
           </a:solidFill>
           <a:ln w="12700">
             <a:solidFill>
-              <a:srgbClr val="15181D"/>
+              <a:srgbClr val="4A4E55"/>
             </a:solidFill>
             <a:prstDash val="solid"/>
           </a:ln>
@@ -11699,7 +11711,7 @@
             <a:r>
               <a:rPr lang="en-US" sz="1300" b="1" dirty="0">
                 <a:solidFill>
-                  <a:schemeClr val="bg1"/>
+                  <a:schemeClr val="tx1"/>
                 </a:solidFill>
               </a:rPr>
               <a:t>Parser</a:t>
@@ -11713,7 +11725,7 @@
             <a:r>
               <a:rPr lang="en-US" sz="1000" dirty="0">
                 <a:solidFill>
-                  <a:schemeClr val="bg1"/>
+                  <a:schemeClr val="tx1"/>
                 </a:solidFill>
                 <a:latin typeface="Consolas" pitchFamily="34" charset="0"/>
                 <a:ea typeface="Consolas" pitchFamily="34" charset="-122"/>
@@ -11742,7 +11754,7 @@
           <a:noFill/>
           <a:ln w="12700">
             <a:solidFill>
-              <a:srgbClr val="4A5260"/>
+              <a:srgbClr val="5A5E66"/>
             </a:solidFill>
             <a:prstDash val="solid"/>
             <a:tailEnd type="triangle"/>
@@ -11764,11 +11776,11 @@
             <a:avLst/>
           </a:prstGeom>
           <a:solidFill>
-            <a:schemeClr val="tx1"/>
+            <a:srgbClr val="1E2025"/>
           </a:solidFill>
           <a:ln w="12700">
             <a:solidFill>
-              <a:srgbClr val="15181D"/>
+              <a:srgbClr val="4A4E55"/>
             </a:solidFill>
             <a:prstDash val="solid"/>
           </a:ln>
@@ -11801,7 +11813,7 @@
             <a:r>
               <a:rPr lang="en-US" sz="1300" b="1" dirty="0">
                 <a:solidFill>
-                  <a:schemeClr val="bg1"/>
+                  <a:schemeClr val="tx1"/>
                 </a:solidFill>
               </a:rPr>
               <a:t>Checker</a:t>
@@ -11815,7 +11827,7 @@
             <a:r>
               <a:rPr lang="en-US" sz="1000" dirty="0">
                 <a:solidFill>
-                  <a:schemeClr val="bg1"/>
+                  <a:schemeClr val="tx1"/>
                 </a:solidFill>
                 <a:latin typeface="Consolas" pitchFamily="34" charset="0"/>
                 <a:ea typeface="Consolas" pitchFamily="34" charset="-122"/>
@@ -11844,7 +11856,7 @@
           <a:noFill/>
           <a:ln w="12700">
             <a:solidFill>
-              <a:srgbClr val="4A5260"/>
+              <a:srgbClr val="5A5E66"/>
             </a:solidFill>
             <a:prstDash val="solid"/>
             <a:tailEnd type="triangle"/>
@@ -11866,11 +11878,11 @@
             <a:avLst/>
           </a:prstGeom>
           <a:solidFill>
-            <a:schemeClr val="tx1"/>
+            <a:srgbClr val="1E2025"/>
           </a:solidFill>
           <a:ln w="12700">
             <a:solidFill>
-              <a:srgbClr val="15181D"/>
+              <a:srgbClr val="4A4E55"/>
             </a:solidFill>
             <a:prstDash val="solid"/>
           </a:ln>
@@ -11903,7 +11915,7 @@
             <a:r>
               <a:rPr lang="en-US" sz="1300" b="1" dirty="0">
                 <a:solidFill>
-                  <a:schemeClr val="bg1"/>
+                  <a:schemeClr val="tx1"/>
                 </a:solidFill>
               </a:rPr>
               <a:t>Lowering</a:t>
@@ -11917,7 +11929,7 @@
             <a:r>
               <a:rPr lang="en-US" sz="1000" dirty="0">
                 <a:solidFill>
-                  <a:schemeClr val="bg1"/>
+                  <a:schemeClr val="tx1"/>
                 </a:solidFill>
                 <a:latin typeface="Consolas" pitchFamily="34" charset="0"/>
                 <a:ea typeface="Consolas" pitchFamily="34" charset="-122"/>
@@ -11946,7 +11958,7 @@
           <a:noFill/>
           <a:ln w="12700">
             <a:solidFill>
-              <a:srgbClr val="4A5260"/>
+              <a:srgbClr val="5A5E66"/>
             </a:solidFill>
             <a:prstDash val="solid"/>
             <a:tailEnd type="triangle"/>
@@ -11968,11 +11980,11 @@
             <a:avLst/>
           </a:prstGeom>
           <a:solidFill>
-            <a:schemeClr val="bg1"/>
+            <a:srgbClr val="0F1012"/>
           </a:solidFill>
           <a:ln w="12700">
             <a:solidFill>
-              <a:srgbClr val="15181D"/>
+              <a:srgbClr val="4A4E55"/>
             </a:solidFill>
             <a:prstDash val="dash"/>
           </a:ln>
@@ -12048,7 +12060,7 @@
           <a:noFill/>
           <a:ln w="12700">
             <a:solidFill>
-              <a:srgbClr val="4A5260"/>
+              <a:srgbClr val="5A5E66"/>
             </a:solidFill>
             <a:prstDash val="solid"/>
             <a:tailEnd type="triangle"/>
@@ -12070,11 +12082,11 @@
             <a:avLst/>
           </a:prstGeom>
           <a:solidFill>
-            <a:schemeClr val="tx1"/>
+            <a:srgbClr val="1E2025"/>
           </a:solidFill>
           <a:ln w="12700">
             <a:solidFill>
-              <a:srgbClr val="15181D"/>
+              <a:srgbClr val="4A4E55"/>
             </a:solidFill>
             <a:prstDash val="solid"/>
           </a:ln>
@@ -12107,7 +12119,7 @@
             <a:r>
               <a:rPr lang="en-US" sz="1300" b="1" dirty="0">
                 <a:solidFill>
-                  <a:schemeClr val="bg1"/>
+                  <a:schemeClr val="tx1"/>
                 </a:solidFill>
               </a:rPr>
               <a:t>JS emitter</a:t>
@@ -12121,7 +12133,7 @@
             <a:r>
               <a:rPr lang="en-US" sz="1000" dirty="0">
                 <a:solidFill>
-                  <a:schemeClr val="bg1"/>
+                  <a:schemeClr val="tx1"/>
                 </a:solidFill>
                 <a:latin typeface="Consolas" pitchFamily="34" charset="0"/>
                 <a:ea typeface="Consolas" pitchFamily="34" charset="-122"/>
@@ -12150,7 +12162,7 @@
           <a:noFill/>
           <a:ln w="12700">
             <a:solidFill>
-              <a:srgbClr val="4A5260"/>
+              <a:srgbClr val="5A5E66"/>
             </a:solidFill>
             <a:prstDash val="solid"/>
             <a:tailEnd type="triangle"/>
@@ -12172,11 +12184,11 @@
             <a:avLst/>
           </a:prstGeom>
           <a:solidFill>
-            <a:schemeClr val="tx1"/>
+            <a:srgbClr val="1E2025"/>
           </a:solidFill>
           <a:ln w="12700">
             <a:solidFill>
-              <a:srgbClr val="15181D"/>
+              <a:srgbClr val="4A4E55"/>
             </a:solidFill>
             <a:prstDash val="solid"/>
           </a:ln>
@@ -12209,7 +12221,7 @@
             <a:r>
               <a:rPr lang="en-US" sz="1300" b="1" dirty="0">
                 <a:solidFill>
-                  <a:schemeClr val="bg1"/>
+                  <a:schemeClr val="tx1"/>
                 </a:solidFill>
               </a:rPr>
               <a:t>Source map</a:t>
@@ -12223,7 +12235,7 @@
             <a:r>
               <a:rPr lang="en-US" sz="1000" dirty="0">
                 <a:solidFill>
-                  <a:schemeClr val="bg1"/>
+                  <a:schemeClr val="tx1"/>
                 </a:solidFill>
                 <a:latin typeface="Consolas" pitchFamily="34" charset="0"/>
                 <a:ea typeface="Consolas" pitchFamily="34" charset="-122"/>
@@ -12250,11 +12262,11 @@
             <a:avLst/>
           </a:prstGeom>
           <a:solidFill>
-            <a:schemeClr val="bg1"/>
+            <a:srgbClr val="0F1012"/>
           </a:solidFill>
           <a:ln w="12700">
             <a:solidFill>
-              <a:srgbClr val="15181D"/>
+              <a:srgbClr val="4A4E55"/>
             </a:solidFill>
             <a:prstDash val="solid"/>
           </a:ln>
@@ -12640,7 +12652,7 @@
             <a:lvl1pPr>
               <a:defRPr sz="1000">
                 <a:solidFill>
-                  <a:srgbClr val="9AA1AC"/>
+                  <a:srgbClr val="868A91"/>
                 </a:solidFill>
                 <a:latin typeface="Consolas"/>
                 <a:ea typeface="Consolas"/>
@@ -12777,11 +12789,11 @@
             <a:avLst/>
           </a:prstGeom>
           <a:solidFill>
-            <a:schemeClr val="bg1"/>
+            <a:srgbClr val="0F1012"/>
           </a:solidFill>
           <a:ln w="12700">
             <a:solidFill>
-              <a:srgbClr val="15181D"/>
+              <a:srgbClr val="4A4E55"/>
             </a:solidFill>
             <a:prstDash val="solid"/>
           </a:ln>
@@ -12852,11 +12864,11 @@
             <a:avLst/>
           </a:prstGeom>
           <a:solidFill>
-            <a:schemeClr val="tx1"/>
+            <a:srgbClr val="1E2025"/>
           </a:solidFill>
           <a:ln w="12700">
             <a:solidFill>
-              <a:srgbClr val="15181D"/>
+              <a:srgbClr val="4A4E55"/>
             </a:solidFill>
             <a:prstDash val="solid"/>
           </a:ln>
@@ -12889,7 +12901,7 @@
             <a:r>
               <a:rPr lang="en-US" sz="1400" b="1" dirty="0">
                 <a:solidFill>
-                  <a:schemeClr val="bg1"/>
+                  <a:schemeClr val="tx1"/>
                 </a:solidFill>
               </a:rPr>
               <a:t>Chrome 2: DevTools</a:t>
@@ -12903,7 +12915,7 @@
             <a:r>
               <a:rPr lang="en-US" sz="1200" dirty="0">
                 <a:solidFill>
-                  <a:schemeClr val="bg1"/>
+                  <a:schemeClr val="tx1"/>
                 </a:solidFill>
               </a:rPr>
               <a:t>its own DevTools UI, driven by keyboard: open fib.tth, go to line, toggle breakpoint</a:t>
@@ -12927,11 +12939,11 @@
             <a:avLst/>
           </a:prstGeom>
           <a:solidFill>
-            <a:schemeClr val="bg1"/>
+            <a:srgbClr val="0F1012"/>
           </a:solidFill>
           <a:ln w="12700">
             <a:solidFill>
-              <a:srgbClr val="15181D"/>
+              <a:srgbClr val="4A4E55"/>
             </a:solidFill>
             <a:prstDash val="solid"/>
           </a:ln>
@@ -13004,7 +13016,7 @@
           <a:noFill/>
           <a:ln w="15240">
             <a:solidFill>
-              <a:srgbClr val="4A5260"/>
+              <a:srgbClr val="5A5E66"/>
             </a:solidFill>
             <a:prstDash val="solid"/>
             <a:headEnd type="triangle"/>
@@ -13029,7 +13041,7 @@
           <a:noFill/>
           <a:ln w="15240">
             <a:solidFill>
-              <a:srgbClr val="4A5260"/>
+              <a:srgbClr val="5A5E66"/>
             </a:solidFill>
             <a:prstDash val="solid"/>
             <a:headEnd type="triangle"/>
@@ -13403,7 +13415,7 @@
             <a:lvl1pPr>
               <a:defRPr sz="1000">
                 <a:solidFill>
-                  <a:srgbClr val="9AA1AC"/>
+                  <a:srgbClr val="868A91"/>
                 </a:solidFill>
                 <a:latin typeface="Consolas"/>
                 <a:ea typeface="Consolas"/>
@@ -13565,7 +13577,7 @@
           </a:prstGeom>
           <a:ln w="9525">
             <a:solidFill>
-              <a:srgbClr val="C3C8D0"/>
+              <a:srgbClr val="3A3D44"/>
             </a:solidFill>
             <a:prstDash val="solid"/>
           </a:ln>
@@ -13892,7 +13904,7 @@
             <a:lvl1pPr>
               <a:defRPr sz="1000">
                 <a:solidFill>
-                  <a:srgbClr val="9AA1AC"/>
+                  <a:srgbClr val="868A91"/>
                 </a:solidFill>
                 <a:latin typeface="Consolas"/>
                 <a:ea typeface="Consolas"/>
@@ -14053,7 +14065,7 @@
                       <a:r>
                         <a:rPr lang="en-US" sz="1100" b="1" dirty="0">
                           <a:solidFill>
-                            <a:srgbClr val="4A5260"/>
+                            <a:srgbClr val="A9ACB2"/>
                           </a:solidFill>
                         </a:rPr>
                         <a:t>Program</a:t>
@@ -14073,7 +14085,7 @@
                     </a:lnT>
                     <a:lnB w="12700" cap="flat" cmpd="sng" algn="ctr">
                       <a:solidFill>
-                        <a:srgbClr val="15181D"/>
+                        <a:srgbClr val="4A4E55"/>
                       </a:solidFill>
                       <a:prstDash val="solid"/>
                       <a:round/>
@@ -14093,7 +14105,7 @@
                       <a:r>
                         <a:rPr lang="en-US" sz="1100" b="1" dirty="0">
                           <a:solidFill>
-                            <a:srgbClr val="4A5260"/>
+                            <a:srgbClr val="A9ACB2"/>
                           </a:solidFill>
                         </a:rPr>
                         <a:t>Lines with a breakpoint</a:t>
@@ -14113,7 +14125,7 @@
                     </a:lnT>
                     <a:lnB w="12700" cap="flat" cmpd="sng" algn="ctr">
                       <a:solidFill>
-                        <a:srgbClr val="15181D"/>
+                        <a:srgbClr val="4A4E55"/>
                       </a:solidFill>
                       <a:prstDash val="solid"/>
                       <a:round/>
@@ -14133,7 +14145,7 @@
                       <a:r>
                         <a:rPr lang="en-US" sz="1100" b="1" dirty="0">
                           <a:solidFill>
-                            <a:srgbClr val="4A5260"/>
+                            <a:srgbClr val="A9ACB2"/>
                           </a:solidFill>
                         </a:rPr>
                         <a:t>Halted there</a:t>
@@ -14153,7 +14165,7 @@
                     </a:lnT>
                     <a:lnB w="12700" cap="flat" cmpd="sng" algn="ctr">
                       <a:solidFill>
-                        <a:srgbClr val="15181D"/>
+                        <a:srgbClr val="4A4E55"/>
                       </a:solidFill>
                       <a:prstDash val="solid"/>
                       <a:round/>
@@ -14175,7 +14187,7 @@
                       <a:r>
                         <a:rPr lang="en-US" sz="1300" dirty="0">
                           <a:solidFill>
-                            <a:srgbClr val="15181D"/>
+                            <a:srgbClr val="E4E4E2"/>
                           </a:solidFill>
                           <a:latin typeface="Consolas" pitchFamily="34" charset="0"/>
                           <a:ea typeface="Consolas" pitchFamily="34" charset="-122"/>
@@ -14202,7 +14214,7 @@
                     </a:lnT>
                     <a:lnB w="9525" cap="flat" cmpd="sng" algn="ctr">
                       <a:solidFill>
-                        <a:srgbClr val="DADDE2"/>
+                        <a:srgbClr val="2A2D33"/>
                       </a:solidFill>
                       <a:prstDash val="solid"/>
                       <a:round/>
@@ -14222,7 +14234,7 @@
                       <a:r>
                         <a:rPr lang="en-US" sz="1300" dirty="0">
                           <a:solidFill>
-                            <a:srgbClr val="15181D"/>
+                            <a:srgbClr val="E4E4E2"/>
                           </a:solidFill>
                         </a:rPr>
                         <a:t>4, 5, 7, 11, 14, 15, 18, 22, 24</a:t>
@@ -14242,7 +14254,7 @@
                     </a:lnT>
                     <a:lnB w="9525" cap="flat" cmpd="sng" algn="ctr">
                       <a:solidFill>
-                        <a:srgbClr val="DADDE2"/>
+                        <a:srgbClr val="2A2D33"/>
                       </a:solidFill>
                       <a:prstDash val="solid"/>
                       <a:round/>
@@ -14262,7 +14274,7 @@
                       <a:r>
                         <a:rPr lang="en-US" sz="1300" b="1" dirty="0">
                           <a:solidFill>
-                            <a:srgbClr val="1F7A4D"/>
+                            <a:srgbClr val="5CC98A"/>
                           </a:solidFill>
                         </a:rPr>
                         <a:t>9 of 9</a:t>
@@ -14282,7 +14294,7 @@
                     </a:lnT>
                     <a:lnB w="9525" cap="flat" cmpd="sng" algn="ctr">
                       <a:solidFill>
-                        <a:srgbClr val="DADDE2"/>
+                        <a:srgbClr val="2A2D33"/>
                       </a:solidFill>
                       <a:prstDash val="solid"/>
                       <a:round/>
@@ -14304,7 +14316,7 @@
                       <a:r>
                         <a:rPr lang="en-US" sz="1300" dirty="0">
                           <a:solidFill>
-                            <a:srgbClr val="15181D"/>
+                            <a:srgbClr val="E4E4E2"/>
                           </a:solidFill>
                           <a:latin typeface="Consolas" pitchFamily="34" charset="0"/>
                           <a:ea typeface="Consolas" pitchFamily="34" charset="-122"/>
@@ -14331,7 +14343,7 @@
                     </a:lnT>
                     <a:lnB w="9525" cap="flat" cmpd="sng" algn="ctr">
                       <a:solidFill>
-                        <a:srgbClr val="DADDE2"/>
+                        <a:srgbClr val="2A2D33"/>
                       </a:solidFill>
                       <a:prstDash val="solid"/>
                       <a:round/>
@@ -14351,7 +14363,7 @@
                       <a:r>
                         <a:rPr lang="en-US" sz="1300" dirty="0">
                           <a:solidFill>
-                            <a:srgbClr val="15181D"/>
+                            <a:srgbClr val="E4E4E2"/>
                           </a:solidFill>
                         </a:rPr>
                         <a:t>7, 12, 20, 25</a:t>
@@ -14371,7 +14383,7 @@
                     </a:lnT>
                     <a:lnB w="9525" cap="flat" cmpd="sng" algn="ctr">
                       <a:solidFill>
-                        <a:srgbClr val="DADDE2"/>
+                        <a:srgbClr val="2A2D33"/>
                       </a:solidFill>
                       <a:prstDash val="solid"/>
                       <a:round/>
@@ -14391,7 +14403,7 @@
                       <a:r>
                         <a:rPr lang="en-US" sz="1300" b="1" dirty="0">
                           <a:solidFill>
-                            <a:srgbClr val="1F7A4D"/>
+                            <a:srgbClr val="5CC98A"/>
                           </a:solidFill>
                         </a:rPr>
                         <a:t>4 of 4</a:t>
@@ -14411,7 +14423,7 @@
                     </a:lnT>
                     <a:lnB w="9525" cap="flat" cmpd="sng" algn="ctr">
                       <a:solidFill>
-                        <a:srgbClr val="DADDE2"/>
+                        <a:srgbClr val="2A2D33"/>
                       </a:solidFill>
                       <a:prstDash val="solid"/>
                       <a:round/>
@@ -14433,7 +14445,7 @@
                       <a:r>
                         <a:rPr lang="en-US" sz="1300" dirty="0">
                           <a:solidFill>
-                            <a:srgbClr val="15181D"/>
+                            <a:srgbClr val="E4E4E2"/>
                           </a:solidFill>
                           <a:latin typeface="Consolas" pitchFamily="34" charset="0"/>
                           <a:ea typeface="Consolas" pitchFamily="34" charset="-122"/>
@@ -14460,7 +14472,7 @@
                     </a:lnT>
                     <a:lnB w="9525" cap="flat" cmpd="sng" algn="ctr">
                       <a:solidFill>
-                        <a:srgbClr val="DADDE2"/>
+                        <a:srgbClr val="2A2D33"/>
                       </a:solidFill>
                       <a:prstDash val="solid"/>
                       <a:round/>
@@ -14480,7 +14492,7 @@
                       <a:r>
                         <a:rPr lang="en-US" sz="1300" dirty="0">
                           <a:solidFill>
-                            <a:srgbClr val="15181D"/>
+                            <a:srgbClr val="E4E4E2"/>
                           </a:solidFill>
                         </a:rPr>
                         <a:t>8, 10, 21</a:t>
@@ -14500,7 +14512,7 @@
                     </a:lnT>
                     <a:lnB w="9525" cap="flat" cmpd="sng" algn="ctr">
                       <a:solidFill>
-                        <a:srgbClr val="DADDE2"/>
+                        <a:srgbClr val="2A2D33"/>
                       </a:solidFill>
                       <a:prstDash val="solid"/>
                       <a:round/>
@@ -14520,7 +14532,7 @@
                       <a:r>
                         <a:rPr lang="en-US" sz="1300" b="1" dirty="0">
                           <a:solidFill>
-                            <a:srgbClr val="1F7A4D"/>
+                            <a:srgbClr val="5CC98A"/>
                           </a:solidFill>
                         </a:rPr>
                         <a:t>3 of 3</a:t>
@@ -14540,7 +14552,7 @@
                     </a:lnT>
                     <a:lnB w="9525" cap="flat" cmpd="sng" algn="ctr">
                       <a:solidFill>
-                        <a:srgbClr val="DADDE2"/>
+                        <a:srgbClr val="2A2D33"/>
                       </a:solidFill>
                       <a:prstDash val="solid"/>
                       <a:round/>
@@ -14562,7 +14574,7 @@
                       <a:r>
                         <a:rPr lang="en-US" sz="1300" dirty="0">
                           <a:solidFill>
-                            <a:srgbClr val="15181D"/>
+                            <a:srgbClr val="E4E4E2"/>
                           </a:solidFill>
                           <a:latin typeface="Consolas" pitchFamily="34" charset="0"/>
                           <a:ea typeface="Consolas" pitchFamily="34" charset="-122"/>
@@ -14589,7 +14601,7 @@
                     </a:lnT>
                     <a:lnB w="9525" cap="flat" cmpd="sng" algn="ctr">
                       <a:solidFill>
-                        <a:srgbClr val="DADDE2"/>
+                        <a:srgbClr val="2A2D33"/>
                       </a:solidFill>
                       <a:prstDash val="solid"/>
                       <a:round/>
@@ -14609,7 +14621,7 @@
                       <a:r>
                         <a:rPr lang="en-US" sz="1300" dirty="0">
                           <a:solidFill>
-                            <a:srgbClr val="15181D"/>
+                            <a:srgbClr val="E4E4E2"/>
                           </a:solidFill>
                         </a:rPr>
                         <a:t>5, 15, 17, 29</a:t>
@@ -14629,7 +14641,7 @@
                     </a:lnT>
                     <a:lnB w="9525" cap="flat" cmpd="sng" algn="ctr">
                       <a:solidFill>
-                        <a:srgbClr val="DADDE2"/>
+                        <a:srgbClr val="2A2D33"/>
                       </a:solidFill>
                       <a:prstDash val="solid"/>
                       <a:round/>
@@ -14649,7 +14661,7 @@
                       <a:r>
                         <a:rPr lang="en-US" sz="1300" b="1" dirty="0">
                           <a:solidFill>
-                            <a:srgbClr val="1F7A4D"/>
+                            <a:srgbClr val="5CC98A"/>
                           </a:solidFill>
                         </a:rPr>
                         <a:t>4 of 4</a:t>
@@ -14669,7 +14681,7 @@
                     </a:lnT>
                     <a:lnB w="9525" cap="flat" cmpd="sng" algn="ctr">
                       <a:solidFill>
-                        <a:srgbClr val="DADDE2"/>
+                        <a:srgbClr val="2A2D33"/>
                       </a:solidFill>
                       <a:prstDash val="solid"/>
                       <a:round/>
@@ -14785,7 +14797,7 @@
             <a:lvl1pPr>
               <a:defRPr sz="1000">
                 <a:solidFill>
-                  <a:srgbClr val="9AA1AC"/>
+                  <a:srgbClr val="868A91"/>
                 </a:solidFill>
                 <a:latin typeface="Consolas"/>
                 <a:ea typeface="Consolas"/>
@@ -14947,7 +14959,7 @@
           </a:prstGeom>
           <a:ln w="9525">
             <a:solidFill>
-              <a:srgbClr val="C3C8D0"/>
+              <a:srgbClr val="3A3D44"/>
             </a:solidFill>
             <a:prstDash val="solid"/>
           </a:ln>
@@ -15028,7 +15040,7 @@
                       <a:r>
                         <a:rPr lang="en-US" sz="1100" b="1" dirty="0">
                           <a:solidFill>
-                            <a:srgbClr val="4A5260"/>
+                            <a:srgbClr val="A9ACB2"/>
                           </a:solidFill>
                         </a:rPr>
                         <a:t>Frame</a:t>
@@ -15048,7 +15060,7 @@
                     </a:lnT>
                     <a:lnB w="12700" cap="flat" cmpd="sng" algn="ctr">
                       <a:solidFill>
-                        <a:srgbClr val="15181D"/>
+                        <a:srgbClr val="4A4E55"/>
                       </a:solidFill>
                       <a:prstDash val="solid"/>
                       <a:round/>
@@ -15068,7 +15080,7 @@
                       <a:r>
                         <a:rPr lang="en-US" sz="1100" b="1" dirty="0">
                           <a:solidFill>
-                            <a:srgbClr val="4A5260"/>
+                            <a:srgbClr val="A9ACB2"/>
                           </a:solidFill>
                         </a:rPr>
                         <a:t>Generated position</a:t>
@@ -15088,7 +15100,7 @@
                     </a:lnT>
                     <a:lnB w="12700" cap="flat" cmpd="sng" algn="ctr">
                       <a:solidFill>
-                        <a:srgbClr val="15181D"/>
+                        <a:srgbClr val="4A4E55"/>
                       </a:solidFill>
                       <a:prstDash val="solid"/>
                       <a:round/>
@@ -15108,7 +15120,7 @@
                       <a:r>
                         <a:rPr lang="en-US" sz="1100" b="1" dirty="0">
                           <a:solidFill>
-                            <a:srgbClr val="4A5260"/>
+                            <a:srgbClr val="A9ACB2"/>
                           </a:solidFill>
                         </a:rPr>
                         <a:t>Original position</a:t>
@@ -15128,7 +15140,7 @@
                     </a:lnT>
                     <a:lnB w="12700" cap="flat" cmpd="sng" algn="ctr">
                       <a:solidFill>
-                        <a:srgbClr val="15181D"/>
+                        <a:srgbClr val="4A4E55"/>
                       </a:solidFill>
                       <a:prstDash val="solid"/>
                       <a:round/>
@@ -15150,7 +15162,7 @@
                       <a:r>
                         <a:rPr lang="en-US" sz="1300" dirty="0">
                           <a:solidFill>
-                            <a:srgbClr val="15181D"/>
+                            <a:srgbClr val="E4E4E2"/>
                           </a:solidFill>
                           <a:latin typeface="Consolas" pitchFamily="34" charset="0"/>
                           <a:ea typeface="Consolas" pitchFamily="34" charset="-122"/>
@@ -15177,7 +15189,7 @@
                     </a:lnT>
                     <a:lnB w="9525" cap="flat" cmpd="sng" algn="ctr">
                       <a:solidFill>
-                        <a:srgbClr val="DADDE2"/>
+                        <a:srgbClr val="2A2D33"/>
                       </a:solidFill>
                       <a:prstDash val="solid"/>
                       <a:round/>
@@ -15197,7 +15209,7 @@
                       <a:r>
                         <a:rPr lang="en-US" sz="1200" dirty="0">
                           <a:solidFill>
-                            <a:srgbClr val="15181D"/>
+                            <a:srgbClr val="E4E4E2"/>
                           </a:solidFill>
                           <a:latin typeface="Consolas" pitchFamily="34" charset="0"/>
                           <a:ea typeface="Consolas" pitchFamily="34" charset="-122"/>
@@ -15224,7 +15236,7 @@
                     </a:lnT>
                     <a:lnB w="9525" cap="flat" cmpd="sng" algn="ctr">
                       <a:solidFill>
-                        <a:srgbClr val="DADDE2"/>
+                        <a:srgbClr val="2A2D33"/>
                       </a:solidFill>
                       <a:prstDash val="solid"/>
                       <a:round/>
@@ -15244,7 +15256,7 @@
                       <a:r>
                         <a:rPr lang="en-US" sz="1150" dirty="0">
                           <a:solidFill>
-                            <a:srgbClr val="15181D"/>
+                            <a:srgbClr val="E4E4E2"/>
                           </a:solidFill>
                           <a:latin typeface="Consolas" pitchFamily="34" charset="0"/>
                           <a:ea typeface="Consolas" pitchFamily="34" charset="-122"/>
@@ -15271,7 +15283,7 @@
                     </a:lnT>
                     <a:lnB w="9525" cap="flat" cmpd="sng" algn="ctr">
                       <a:solidFill>
-                        <a:srgbClr val="DADDE2"/>
+                        <a:srgbClr val="2A2D33"/>
                       </a:solidFill>
                       <a:prstDash val="solid"/>
                       <a:round/>
@@ -15293,7 +15305,7 @@
                       <a:r>
                         <a:rPr lang="en-US" sz="1300" dirty="0">
                           <a:solidFill>
-                            <a:srgbClr val="15181D"/>
+                            <a:srgbClr val="E4E4E2"/>
                           </a:solidFill>
                           <a:latin typeface="Consolas" pitchFamily="34" charset="0"/>
                           <a:ea typeface="Consolas" pitchFamily="34" charset="-122"/>
@@ -15320,7 +15332,7 @@
                     </a:lnT>
                     <a:lnB w="9525" cap="flat" cmpd="sng" algn="ctr">
                       <a:solidFill>
-                        <a:srgbClr val="DADDE2"/>
+                        <a:srgbClr val="2A2D33"/>
                       </a:solidFill>
                       <a:prstDash val="solid"/>
                       <a:round/>
@@ -15340,7 +15352,7 @@
                       <a:r>
                         <a:rPr lang="en-US" sz="1200" dirty="0">
                           <a:solidFill>
-                            <a:srgbClr val="15181D"/>
+                            <a:srgbClr val="E4E4E2"/>
                           </a:solidFill>
                           <a:latin typeface="Consolas" pitchFamily="34" charset="0"/>
                           <a:ea typeface="Consolas" pitchFamily="34" charset="-122"/>
@@ -15367,7 +15379,7 @@
                     </a:lnT>
                     <a:lnB w="9525" cap="flat" cmpd="sng" algn="ctr">
                       <a:solidFill>
-                        <a:srgbClr val="DADDE2"/>
+                        <a:srgbClr val="2A2D33"/>
                       </a:solidFill>
                       <a:prstDash val="solid"/>
                       <a:round/>
@@ -15387,7 +15399,7 @@
                       <a:r>
                         <a:rPr lang="en-US" sz="1150" dirty="0">
                           <a:solidFill>
-                            <a:srgbClr val="15181D"/>
+                            <a:srgbClr val="E4E4E2"/>
                           </a:solidFill>
                           <a:latin typeface="Consolas" pitchFamily="34" charset="0"/>
                           <a:ea typeface="Consolas" pitchFamily="34" charset="-122"/>
@@ -15414,7 +15426,7 @@
                     </a:lnT>
                     <a:lnB w="9525" cap="flat" cmpd="sng" algn="ctr">
                       <a:solidFill>
-                        <a:srgbClr val="DADDE2"/>
+                        <a:srgbClr val="2A2D33"/>
                       </a:solidFill>
                       <a:prstDash val="solid"/>
                       <a:round/>
@@ -15494,7 +15506,7 @@
             <a:lvl1pPr>
               <a:defRPr sz="1000">
                 <a:solidFill>
-                  <a:srgbClr val="9AA1AC"/>
+                  <a:srgbClr val="868A91"/>
                 </a:solidFill>
                 <a:latin typeface="Consolas"/>
                 <a:ea typeface="Consolas"/>
@@ -15525,40 +15537,40 @@
   <a:themeElements>
     <a:clrScheme name="Tether Spans">
       <a:dk1>
-        <a:srgbClr val="15181D"/>
+        <a:srgbClr val="E4E4E2"/>
       </a:dk1>
       <a:lt1>
-        <a:srgbClr val="FFFFFF"/>
+        <a:srgbClr val="0F1012"/>
       </a:lt1>
       <a:dk2>
-        <a:srgbClr val="4A5260"/>
+        <a:srgbClr val="A9ACB2"/>
       </a:dk2>
       <a:lt2>
-        <a:srgbClr val="F3F4F6"/>
+        <a:srgbClr val="18191D"/>
       </a:lt2>
       <a:accent1>
-        <a:srgbClr val="F5B82E"/>
+        <a:srgbClr val="F0B54A"/>
       </a:accent1>
       <a:accent2>
-        <a:srgbClr val="1F4E79"/>
+        <a:srgbClr val="8AB4F8"/>
       </a:accent2>
       <a:accent3>
-        <a:srgbClr val="1F7A4D"/>
+        <a:srgbClr val="5CC98A"/>
       </a:accent3>
       <a:accent4>
-        <a:srgbClr val="B83227"/>
+        <a:srgbClr val="FF6F6B"/>
       </a:accent4>
       <a:accent5>
-        <a:srgbClr val="9AA1AC"/>
+        <a:srgbClr val="868A91"/>
       </a:accent5>
       <a:accent6>
-        <a:srgbClr val="5B4B8A"/>
+        <a:srgbClr val="C6A8F2"/>
       </a:accent6>
       <a:hlink>
-        <a:srgbClr val="1F4E79"/>
+        <a:srgbClr val="8AB4F8"/>
       </a:hlink>
       <a:folHlink>
-        <a:srgbClr val="5B4B8A"/>
+        <a:srgbClr val="C6A8F2"/>
       </a:folHlink>
     </a:clrScheme>
     <a:fontScheme name="Tether Spans">

--- a/docs/Tether-Review3-Presentation.pptx
+++ b/docs/Tether-Review3-Presentation.pptx
@@ -670,10 +670,10 @@
                     <c:v>Optimiser</c:v>
                   </c:pt>
                   <c:pt idx="5">
-                    <c:v>Lexer</c:v>
+                    <c:v>Emitter</c:v>
                   </c:pt>
                   <c:pt idx="6">
-                    <c:v>Emitter</c:v>
+                    <c:v>Lexer</c:v>
                   </c:pt>
                   <c:pt idx="7">
                     <c:v>Lowering</c:v>
@@ -701,28 +701,28 @@
                 <c:formatCode>General</c:formatCode>
                 <c:ptCount val="12"/>
                 <c:pt idx="0">
-                  <c:v>44</c:v>
+                  <c:v>45</c:v>
                 </c:pt>
                 <c:pt idx="1">
+                  <c:v>30</c:v>
+                </c:pt>
+                <c:pt idx="2">
+                  <c:v>28</c:v>
+                </c:pt>
+                <c:pt idx="3">
+                  <c:v>23</c:v>
+                </c:pt>
+                <c:pt idx="4">
                   <c:v>20</c:v>
                 </c:pt>
-                <c:pt idx="2">
-                  <c:v>19</c:v>
-                </c:pt>
-                <c:pt idx="3">
-                  <c:v>18</c:v>
-                </c:pt>
-                <c:pt idx="4">
-                  <c:v>14</c:v>
-                </c:pt>
                 <c:pt idx="5">
-                  <c:v>13</c:v>
+                  <c:v>17</c:v>
                 </c:pt>
                 <c:pt idx="6">
-                  <c:v>12</c:v>
+                  <c:v>15</c:v>
                 </c:pt>
                 <c:pt idx="7">
-                  <c:v>9</c:v>
+                  <c:v>11</c:v>
                 </c:pt>
                 <c:pt idx="8">
                   <c:v>6</c:v>
@@ -1531,7 +1531,7 @@
           <a:p>
             <a:r>
               <a:rPr lang="en-US" dirty="0"/>
-              <a:t>The final suite has 170 tests, all passing. The evidence comes in four kinds: unit tests per phase, golden files compared byte for byte, Node’s independent source-map decoder, and the real browser check, which is a separate script because it needs Chrome.</a:t>
+              <a:t>The final suite has 209 tests, all passing. The evidence comes in four kinds: unit tests per phase, golden files compared byte for byte, Node’s independent source-map decoder, and the real browser check, which is a separate script because it needs Chrome.</a:t>
             </a:r>
             <a:endParaRPr lang="en-US" dirty="0"/>
           </a:p>
@@ -1619,7 +1619,7 @@
           <a:p>
             <a:r>
               <a:rPr lang="en-US" dirty="0"/>
-              <a:t>The playground runs the real compiler in the browser. With the -O1 switch on, the phase strip shows 8 expressions folded and 7 statements removed for the optimisation test program, and the JavaScript shrinks from 21 lines to 12.</a:t>
+              <a:t>The playground runs the real compiler in the browser, every phase live as you type, and the -O1 switch shows what was folded and removed. Here I added one line that reads past the end of an array and pressed Run. The error says sieve.tth line 33, column 7: the page finds that position through the mapping table, the same data the source map encodes, and the amber line ties the error back to primes[99] in the source.</a:t>
             </a:r>
             <a:endParaRPr lang="en-US" dirty="0"/>
           </a:p>
@@ -1707,7 +1707,7 @@
           <a:p>
             <a:r>
               <a:rPr lang="en-US" dirty="0"/>
-              <a:t>Some honest limitations. Mappings are statement and identifier level, not every sub-expression. I verified on Chrome and a current Node, not Firefox or Node 18 specifically. The benchmarks give zero fidelity loss under -O1 simply because there is nothing to optimise in them. And the language is deliberately small. The future work follows from these.</a:t>
+              <a:t>Some honest limitations. I verified in Chrome and a current Node, and the tests run on Node 18, 20 and 22, but not in Firefox. The benchmarks give zero fidelity loss under -O1 simply because there is nothing to optimise in them. And the language is deliberately small. Three items from my earlier future-work list are now done: mappings inside expressions, constant propagation, and arrays with break and continue. What remains is scope information for debuggers, Firefox, a richer language, and measuring fidelity on larger programs.</a:t>
             </a:r>
             <a:endParaRPr lang="en-US" dirty="0"/>
           </a:p>
@@ -2411,7 +2411,7 @@
           <a:p>
             <a:r>
               <a:rPr lang="en-US" dirty="0"/>
-              <a:t>The final pipeline. The optimiser, drawn dashed, runs only with -O1. The whole compiler is about two thousand lines with no dependencies, and a full compile of a benchmark takes under a tenth of a millisecond.</a:t>
+              <a:t>The final pipeline. The optimiser, drawn dashed, runs only with -O1. The whole compiler is about two and a half thousand lines with no dependencies, and a full compile of a benchmark takes under a tenth of a millisecond.</a:t>
             </a:r>
             <a:endParaRPr lang="en-US" dirty="0"/>
           </a:p>
@@ -5319,7 +5319,7 @@
                   <a:schemeClr val="tx1"/>
                 </a:solidFill>
               </a:rPr>
-              <a:t>170 tests, and four kinds of evidence</a:t>
+              <a:t>209 tests, and four kinds of evidence</a:t>
             </a:r>
             <a:endParaRPr lang="en-US" sz="2800" dirty="0"/>
           </a:p>
@@ -6037,7 +6037,7 @@
                   <a:schemeClr val="tx2"/>
                 </a:solidFill>
               </a:rPr>
-              <a:t>executes the generated program</a:t>
+              <a:t>a runtime error names the .tth line; the tether points to it</a:t>
             </a:r>
             <a:endParaRPr lang="en-US" sz="1250" dirty="0"/>
           </a:p>
@@ -6265,7 +6265,7 @@
                   <a:schemeClr val="tx2"/>
                 </a:solidFill>
               </a:rPr>
-              <a:t>Mappings cover statements and identifiers, not every sub-expression</a:t>
+              <a:t>Verified in Chrome 155 and Node 25, with the tests on Node 18, 20 and 22; Firefox not tested</a:t>
             </a:r>
             <a:endParaRPr lang="en-US" sz="1300" dirty="0"/>
           </a:p>
@@ -6283,7 +6283,7 @@
                   <a:schemeClr val="tx2"/>
                 </a:solidFill>
               </a:rPr>
-              <a:t>Verified on Chrome 155 and Node 25; Firefox and Node 18 not tested separately</a:t>
+              <a:t>The benchmarks have nothing for -O1 to remove, so their measured loss is zero by construction</a:t>
             </a:r>
             <a:endParaRPr lang="en-US" sz="1300" dirty="0"/>
           </a:p>
@@ -6301,7 +6301,7 @@
                   <a:schemeClr val="tx2"/>
                 </a:solidFill>
               </a:rPr>
-              <a:t>The benchmarks have nothing for -O1 to remove, so their measured loss is zero by construction</a:t>
+              <a:t>A deliberately small language: one-dimensional arrays, no closures or modules</a:t>
             </a:r>
             <a:endParaRPr lang="en-US" sz="1300" dirty="0"/>
           </a:p>
@@ -6319,7 +6319,7 @@
                   <a:schemeClr val="tx2"/>
                 </a:solidFill>
               </a:rPr>
-              <a:t>A deliberately small language: no arrays, closures or modules; integers are JavaScript numbers</a:t>
+              <a:t>Integers are JavaScript numbers: overflow is not checked</a:t>
             </a:r>
             <a:endParaRPr lang="en-US" sz="1300" dirty="0"/>
           </a:p>
@@ -6395,7 +6395,7 @@
                   <a:schemeClr val="tx2"/>
                 </a:solidFill>
               </a:rPr>
-              <a:t>Expression-level mappings for more precise stack-trace columns (PRD open question 1)</a:t>
+              <a:t>Emit scope information, so debuggers can show the original variable names everywhere</a:t>
             </a:r>
             <a:endParaRPr lang="en-US" sz="1300" dirty="0"/>
           </a:p>
@@ -6431,7 +6431,7 @@
                   <a:schemeClr val="tx2"/>
                 </a:solidFill>
               </a:rPr>
-              <a:t>Constant propagation, with rules that keep mappings for code that still runs</a:t>
+              <a:t>Nested arrays, records and modules</a:t>
             </a:r>
             <a:endParaRPr lang="en-US" sz="1300" dirty="0"/>
           </a:p>
@@ -6449,7 +6449,7 @@
                   <a:schemeClr val="tx2"/>
                 </a:solidFill>
               </a:rPr>
-              <a:t>Emit scope information, so debuggers can show the original variable names everywhere</a:t>
+              <a:t>Measure fidelity on larger, real programs</a:t>
             </a:r>
             <a:endParaRPr lang="en-US" sz="1300" dirty="0"/>
           </a:p>
@@ -12355,7 +12355,7 @@
                 <a:ea typeface="Cambria" pitchFamily="34" charset="-122"/>
                 <a:cs typeface="Cambria" pitchFamily="34" charset="-120"/>
               </a:rPr>
-              <a:t>2,155</a:t>
+              <a:t>2,506</a:t>
             </a:r>
             <a:endParaRPr lang="en-US" sz="3400" dirty="0"/>
           </a:p>
@@ -12580,7 +12580,7 @@
                 <a:ea typeface="Cambria" pitchFamily="34" charset="-122"/>
                 <a:cs typeface="Cambria" pitchFamily="34" charset="-120"/>
               </a:rPr>
-              <a:t>170</a:t>
+              <a:t>209</a:t>
             </a:r>
             <a:endParaRPr lang="en-US" sz="3400" dirty="0"/>
           </a:p>
